--- a/resources/ppt_AMAPhD_07_11_2024.pptx
+++ b/resources/ppt_AMAPhD_07_11_2024.pptx
@@ -5,7 +5,7 @@
     <p:sldMasterId id="2147483648" r:id="rId3"/>
   </p:sldMasterIdLst>
   <p:notesMasterIdLst>
-    <p:notesMasterId r:id="rId25"/>
+    <p:notesMasterId r:id="rId26"/>
   </p:notesMasterIdLst>
   <p:sldIdLst>
     <p:sldId id="256" r:id="rId4"/>
@@ -16,19 +16,20 @@
     <p:sldId id="298" r:id="rId9"/>
     <p:sldId id="299" r:id="rId10"/>
     <p:sldId id="283" r:id="rId11"/>
-    <p:sldId id="307" r:id="rId12"/>
-    <p:sldId id="314" r:id="rId13"/>
-    <p:sldId id="315" r:id="rId14"/>
-    <p:sldId id="272" r:id="rId15"/>
-    <p:sldId id="313" r:id="rId16"/>
-    <p:sldId id="257" r:id="rId17"/>
-    <p:sldId id="301" r:id="rId18"/>
-    <p:sldId id="290" r:id="rId19"/>
-    <p:sldId id="266" r:id="rId20"/>
-    <p:sldId id="270" r:id="rId21"/>
-    <p:sldId id="312" r:id="rId22"/>
-    <p:sldId id="311" r:id="rId23"/>
-    <p:sldId id="309" r:id="rId24"/>
+    <p:sldId id="319" r:id="rId12"/>
+    <p:sldId id="307" r:id="rId13"/>
+    <p:sldId id="314" r:id="rId14"/>
+    <p:sldId id="315" r:id="rId15"/>
+    <p:sldId id="272" r:id="rId16"/>
+    <p:sldId id="313" r:id="rId17"/>
+    <p:sldId id="257" r:id="rId18"/>
+    <p:sldId id="301" r:id="rId19"/>
+    <p:sldId id="290" r:id="rId20"/>
+    <p:sldId id="266" r:id="rId21"/>
+    <p:sldId id="270" r:id="rId22"/>
+    <p:sldId id="312" r:id="rId23"/>
+    <p:sldId id="311" r:id="rId24"/>
+    <p:sldId id="309" r:id="rId25"/>
   </p:sldIdLst>
   <p:sldSz cx="12192000" cy="6858000"/>
   <p:notesSz cx="6858000" cy="9144000"/>
@@ -217,7 +218,7 @@
           <a:p>
             <a:fld id="{151C0664-3760-4B25-9F25-C7AAC42DAE60}" type="datetimeFigureOut">
               <a:rPr lang="en-US" smtClean="0"/>
-              <a:t>11/5/2024</a:t>
+              <a:t>11/19/2024</a:t>
             </a:fld>
             <a:endParaRPr lang="en-US"/>
           </a:p>
@@ -696,7 +697,7 @@
     </p:spTree>
     <p:extLst>
       <p:ext uri="{BB962C8B-B14F-4D97-AF65-F5344CB8AC3E}">
-        <p14:creationId xmlns:p14="http://schemas.microsoft.com/office/powerpoint/2010/main" val="1314881870"/>
+        <p14:creationId xmlns:p14="http://schemas.microsoft.com/office/powerpoint/2010/main" val="2124036290"/>
       </p:ext>
     </p:extLst>
   </p:cSld>
@@ -750,12 +751,15 @@
           <a:bodyPr/>
           <a:lstStyle/>
           <a:p>
-            <a:pPr marL="0" indent="0">
-              <a:buNone/>
-            </a:pPr>
             <a:r>
               <a:rPr lang="en-US" dirty="0"/>
-              <a:t>The growth of </a:t>
+              <a:t>For a given process, for intercrops, what scale is the most relevant ?</a:t>
+            </a:r>
+          </a:p>
+          <a:p>
+            <a:r>
+              <a:rPr lang="en-US" dirty="0"/>
+              <a:t>C1: how to create an equivalent of a crop model simulation, but </a:t>
             </a:r>
             <a:r>
               <a:rPr lang="en-US" dirty="0" err="1"/>
@@ -763,118 +767,27 @@
             </a:r>
             <a:r>
               <a:rPr lang="en-US" dirty="0"/>
-              <a:t> plant organs does not emerge from local laws, nor is directly conditioned by environmental resources. Indeed, it is calculated using an </a:t>
-            </a:r>
-            <a:r>
-              <a:rPr lang="en-US" dirty="0" err="1"/>
-              <a:t>integro</a:t>
-            </a:r>
+              <a:t> ?</a:t>
+            </a:r>
+          </a:p>
+          <a:p>
             <a:r>
               <a:rPr lang="en-US" dirty="0"/>
-              <a:t>-differential approach from a global constraint. </a:t>
-            </a:r>
-          </a:p>
-          <a:p>
-            <a:pPr marL="0" indent="0">
-              <a:buNone/>
-            </a:pPr>
-            <a:endParaRPr lang="en-US" dirty="0"/>
-          </a:p>
-          <a:p>
-            <a:pPr marL="0" indent="0">
-              <a:buNone/>
-            </a:pPr>
-            <a:r>
-              <a:rPr lang="fr-FR" dirty="0" err="1"/>
-              <a:t>ArchiCrop</a:t>
-            </a:r>
+              <a:t>Peng 2020</a:t>
+            </a:r>
+          </a:p>
+          <a:p>
+            <a:endParaRPr lang="fr-FR" dirty="0"/>
+          </a:p>
+          <a:p>
             <a:r>
               <a:rPr lang="fr-FR" dirty="0"/>
-              <a:t>, </a:t>
-            </a:r>
-            <a:br>
-              <a:rPr lang="fr-FR" dirty="0"/>
-            </a:br>
-            <a:r>
-              <a:rPr lang="fr-FR" dirty="0"/>
-              <a:t>a 3D </a:t>
-            </a:r>
-            <a:r>
-              <a:rPr lang="fr-FR" dirty="0" err="1"/>
-              <a:t>dynamic</a:t>
-            </a:r>
-            <a:r>
-              <a:rPr lang="fr-FR" dirty="0"/>
-              <a:t> </a:t>
-            </a:r>
-            <a:r>
-              <a:rPr lang="fr-FR" dirty="0" err="1"/>
-              <a:t>parametric</a:t>
-            </a:r>
-            <a:r>
-              <a:rPr lang="fr-FR" dirty="0"/>
-              <a:t> model for </a:t>
-            </a:r>
-            <a:r>
-              <a:rPr lang="fr-FR" dirty="0" err="1"/>
-              <a:t>cereals</a:t>
-            </a:r>
-            <a:endParaRPr lang="en-US" dirty="0"/>
-          </a:p>
-          <a:p>
-            <a:pPr marL="0" marR="0" lvl="0" indent="0" algn="l" defTabSz="914400" rtl="0" eaLnBrk="1" fontAlgn="auto" latinLnBrk="0" hangingPunct="1">
-              <a:lnSpc>
-                <a:spcPct val="100000"/>
-              </a:lnSpc>
-              <a:spcBef>
-                <a:spcPts val="0"/>
-              </a:spcBef>
-              <a:spcAft>
-                <a:spcPts val="0"/>
-              </a:spcAft>
-              <a:buClrTx/>
-              <a:buSzTx/>
-              <a:buFontTx/>
-              <a:buNone/>
-              <a:tabLst/>
-              <a:defRPr/>
-            </a:pPr>
+              <a:t>M</a:t>
+            </a:r>
             <a:r>
               <a:rPr lang="en-US" dirty="0"/>
-              <a:t>using a top-down approach to simulate the differential growth of cereal plants through time from canopy-scale dynamic constraints on growth (e.g. crop model simulation outputs). </a:t>
-            </a:r>
-          </a:p>
-          <a:p>
-            <a:pPr marL="0" marR="0" lvl="0" indent="0" algn="l" defTabSz="914400" rtl="0" eaLnBrk="1" fontAlgn="auto" latinLnBrk="0" hangingPunct="1">
-              <a:lnSpc>
-                <a:spcPct val="100000"/>
-              </a:lnSpc>
-              <a:spcBef>
-                <a:spcPts val="0"/>
-              </a:spcBef>
-              <a:spcAft>
-                <a:spcPts val="0"/>
-              </a:spcAft>
-              <a:buClrTx/>
-              <a:buSzTx/>
-              <a:buFontTx/>
-              <a:buNone/>
-              <a:tabLst/>
-              <a:defRPr/>
-            </a:pPr>
-            <a:endParaRPr lang="en-US" sz="1600" dirty="0"/>
-          </a:p>
-          <a:p>
-            <a:pPr marL="0" indent="0">
-              <a:buNone/>
-            </a:pPr>
-            <a:endParaRPr lang="en-US" dirty="0"/>
-          </a:p>
-          <a:p>
-            <a:pPr marL="0" indent="0">
-              <a:buNone/>
-            </a:pPr>
-            <a:endParaRPr lang="en-US" dirty="0"/>
+              <a:t>ix with previous slide</a:t>
+            </a:r>
           </a:p>
         </p:txBody>
       </p:sp>
@@ -904,7 +817,7 @@
     </p:spTree>
     <p:extLst>
       <p:ext uri="{BB962C8B-B14F-4D97-AF65-F5344CB8AC3E}">
-        <p14:creationId xmlns:p14="http://schemas.microsoft.com/office/powerpoint/2010/main" val="1871060696"/>
+        <p14:creationId xmlns:p14="http://schemas.microsoft.com/office/powerpoint/2010/main" val="1314881870"/>
       </p:ext>
     </p:extLst>
   </p:cSld>
@@ -1112,7 +1025,7 @@
     </p:spTree>
     <p:extLst>
       <p:ext uri="{BB962C8B-B14F-4D97-AF65-F5344CB8AC3E}">
-        <p14:creationId xmlns:p14="http://schemas.microsoft.com/office/powerpoint/2010/main" val="2721988413"/>
+        <p14:creationId xmlns:p14="http://schemas.microsoft.com/office/powerpoint/2010/main" val="1871060696"/>
       </p:ext>
     </p:extLst>
   </p:cSld>
@@ -1166,16 +1079,58 @@
           <a:bodyPr/>
           <a:lstStyle/>
           <a:p>
+            <a:pPr marL="0" indent="0">
+              <a:buNone/>
+            </a:pPr>
             <a:r>
               <a:rPr lang="en-US" dirty="0"/>
-              <a:t>Cereal architecture is defined by parametric laws</a:t>
-            </a:r>
-            <a:endParaRPr lang="fr-FR" dirty="0"/>
-          </a:p>
-          <a:p>
+              <a:t>The growth of </a:t>
+            </a:r>
+            <a:r>
+              <a:rPr lang="en-US" dirty="0" err="1"/>
+              <a:t>architectured</a:t>
+            </a:r>
+            <a:r>
+              <a:rPr lang="en-US" dirty="0"/>
+              <a:t> plant organs does not emerge from local laws, nor is directly conditioned by environmental resources. Indeed, it is calculated using an </a:t>
+            </a:r>
+            <a:r>
+              <a:rPr lang="en-US" dirty="0" err="1"/>
+              <a:t>integro</a:t>
+            </a:r>
+            <a:r>
+              <a:rPr lang="en-US" dirty="0"/>
+              <a:t>-differential approach from a global constraint. </a:t>
+            </a:r>
+          </a:p>
+          <a:p>
+            <a:pPr marL="0" indent="0">
+              <a:buNone/>
+            </a:pPr>
+            <a:endParaRPr lang="en-US" dirty="0"/>
+          </a:p>
+          <a:p>
+            <a:pPr marL="0" indent="0">
+              <a:buNone/>
+            </a:pPr>
             <a:r>
               <a:rPr lang="fr-FR" dirty="0" err="1"/>
-              <a:t>Known</a:t>
+              <a:t>ArchiCrop</a:t>
+            </a:r>
+            <a:r>
+              <a:rPr lang="fr-FR" dirty="0"/>
+              <a:t>, </a:t>
+            </a:r>
+            <a:br>
+              <a:rPr lang="fr-FR" dirty="0"/>
+            </a:br>
+            <a:r>
+              <a:rPr lang="fr-FR" dirty="0"/>
+              <a:t>a 3D </a:t>
+            </a:r>
+            <a:r>
+              <a:rPr lang="fr-FR" dirty="0" err="1"/>
+              <a:t>dynamic</a:t>
             </a:r>
             <a:r>
               <a:rPr lang="fr-FR" dirty="0"/>
@@ -1183,16 +1138,71 @@
             </a:r>
             <a:r>
               <a:rPr lang="fr-FR" dirty="0" err="1"/>
-              <a:t>from</a:t>
+              <a:t>parametric</a:t>
             </a:r>
             <a:r>
               <a:rPr lang="fr-FR" dirty="0"/>
-              <a:t> </a:t>
+              <a:t> model for </a:t>
             </a:r>
             <a:r>
               <a:rPr lang="fr-FR" dirty="0" err="1"/>
-              <a:t>literature</a:t>
-            </a:r>
+              <a:t>cereals</a:t>
+            </a:r>
+            <a:endParaRPr lang="en-US" dirty="0"/>
+          </a:p>
+          <a:p>
+            <a:pPr marL="0" marR="0" lvl="0" indent="0" algn="l" defTabSz="914400" rtl="0" eaLnBrk="1" fontAlgn="auto" latinLnBrk="0" hangingPunct="1">
+              <a:lnSpc>
+                <a:spcPct val="100000"/>
+              </a:lnSpc>
+              <a:spcBef>
+                <a:spcPts val="0"/>
+              </a:spcBef>
+              <a:spcAft>
+                <a:spcPts val="0"/>
+              </a:spcAft>
+              <a:buClrTx/>
+              <a:buSzTx/>
+              <a:buFontTx/>
+              <a:buNone/>
+              <a:tabLst/>
+              <a:defRPr/>
+            </a:pPr>
+            <a:r>
+              <a:rPr lang="en-US" dirty="0"/>
+              <a:t>using a top-down approach to simulate the differential growth of cereal plants through time from canopy-scale dynamic constraints on growth (e.g. crop model simulation outputs). </a:t>
+            </a:r>
+          </a:p>
+          <a:p>
+            <a:pPr marL="0" marR="0" lvl="0" indent="0" algn="l" defTabSz="914400" rtl="0" eaLnBrk="1" fontAlgn="auto" latinLnBrk="0" hangingPunct="1">
+              <a:lnSpc>
+                <a:spcPct val="100000"/>
+              </a:lnSpc>
+              <a:spcBef>
+                <a:spcPts val="0"/>
+              </a:spcBef>
+              <a:spcAft>
+                <a:spcPts val="0"/>
+              </a:spcAft>
+              <a:buClrTx/>
+              <a:buSzTx/>
+              <a:buFontTx/>
+              <a:buNone/>
+              <a:tabLst/>
+              <a:defRPr/>
+            </a:pPr>
+            <a:endParaRPr lang="en-US" sz="1600" dirty="0"/>
+          </a:p>
+          <a:p>
+            <a:pPr marL="0" indent="0">
+              <a:buNone/>
+            </a:pPr>
+            <a:endParaRPr lang="en-US" dirty="0"/>
+          </a:p>
+          <a:p>
+            <a:pPr marL="0" indent="0">
+              <a:buNone/>
+            </a:pPr>
             <a:endParaRPr lang="en-US" dirty="0"/>
           </a:p>
         </p:txBody>
@@ -1223,7 +1233,7 @@
     </p:spTree>
     <p:extLst>
       <p:ext uri="{BB962C8B-B14F-4D97-AF65-F5344CB8AC3E}">
-        <p14:creationId xmlns:p14="http://schemas.microsoft.com/office/powerpoint/2010/main" val="3142479919"/>
+        <p14:creationId xmlns:p14="http://schemas.microsoft.com/office/powerpoint/2010/main" val="2721988413"/>
       </p:ext>
     </p:extLst>
   </p:cSld>
@@ -1279,8 +1289,32 @@
           <a:p>
             <a:r>
               <a:rPr lang="en-US" dirty="0"/>
-              <a:t>Stresses integrated in growth dynamics can impede the growth of potential plant</a:t>
-            </a:r>
+              <a:t>Cereal architecture is defined by parametric laws</a:t>
+            </a:r>
+            <a:endParaRPr lang="fr-FR" dirty="0"/>
+          </a:p>
+          <a:p>
+            <a:r>
+              <a:rPr lang="fr-FR" dirty="0" err="1"/>
+              <a:t>Known</a:t>
+            </a:r>
+            <a:r>
+              <a:rPr lang="fr-FR" dirty="0"/>
+              <a:t> </a:t>
+            </a:r>
+            <a:r>
+              <a:rPr lang="fr-FR" dirty="0" err="1"/>
+              <a:t>from</a:t>
+            </a:r>
+            <a:r>
+              <a:rPr lang="fr-FR" dirty="0"/>
+              <a:t> </a:t>
+            </a:r>
+            <a:r>
+              <a:rPr lang="fr-FR" dirty="0" err="1"/>
+              <a:t>literature</a:t>
+            </a:r>
+            <a:endParaRPr lang="en-US" dirty="0"/>
           </a:p>
         </p:txBody>
       </p:sp>
@@ -1310,7 +1344,7 @@
     </p:spTree>
     <p:extLst>
       <p:ext uri="{BB962C8B-B14F-4D97-AF65-F5344CB8AC3E}">
-        <p14:creationId xmlns:p14="http://schemas.microsoft.com/office/powerpoint/2010/main" val="433239963"/>
+        <p14:creationId xmlns:p14="http://schemas.microsoft.com/office/powerpoint/2010/main" val="3142479919"/>
       </p:ext>
     </p:extLst>
   </p:cSld>
@@ -1366,15 +1400,8 @@
           <a:p>
             <a:r>
               <a:rPr lang="en-US" dirty="0"/>
-              <a:t>Individual variability : parametrized and emergent !</a:t>
-            </a:r>
-          </a:p>
-          <a:p>
-            <a:r>
-              <a:rPr lang="en-US" sz="1200" dirty="0"/>
-              <a:t>For instance, for a given simulation with a crop model, it is possible to obtain a large number of corresponding simulations on a finer scale, by varying these degrees of freedom within a given range of values for a given species. In other words, we can explore the architectural variability of a species by generating a set of morphotypes.</a:t>
-            </a:r>
-            <a:endParaRPr lang="en-US" dirty="0"/>
+              <a:t>Stresses integrated in growth dynamics can impede the growth of potential plant</a:t>
+            </a:r>
           </a:p>
         </p:txBody>
       </p:sp>
@@ -1404,7 +1431,7 @@
     </p:spTree>
     <p:extLst>
       <p:ext uri="{BB962C8B-B14F-4D97-AF65-F5344CB8AC3E}">
-        <p14:creationId xmlns:p14="http://schemas.microsoft.com/office/powerpoint/2010/main" val="1429256966"/>
+        <p14:creationId xmlns:p14="http://schemas.microsoft.com/office/powerpoint/2010/main" val="433239963"/>
       </p:ext>
     </p:extLst>
   </p:cSld>
@@ -1460,8 +1487,15 @@
           <a:p>
             <a:r>
               <a:rPr lang="en-US" dirty="0"/>
-              <a:t>varying within species-specific range</a:t>
-            </a:r>
+              <a:t>Individual variability : parametrized and emergent !</a:t>
+            </a:r>
+          </a:p>
+          <a:p>
+            <a:r>
+              <a:rPr lang="en-US" sz="1200" dirty="0"/>
+              <a:t>For instance, for a given simulation with a crop model, it is possible to obtain a large number of corresponding simulations on a finer scale, by varying these degrees of freedom within a given range of values for a given species. In other words, we can explore the architectural variability of a species by generating a set of morphotypes.</a:t>
+            </a:r>
+            <a:endParaRPr lang="en-US" dirty="0"/>
           </a:p>
         </p:txBody>
       </p:sp>
@@ -1491,7 +1525,7 @@
     </p:spTree>
     <p:extLst>
       <p:ext uri="{BB962C8B-B14F-4D97-AF65-F5344CB8AC3E}">
-        <p14:creationId xmlns:p14="http://schemas.microsoft.com/office/powerpoint/2010/main" val="1375912186"/>
+        <p14:creationId xmlns:p14="http://schemas.microsoft.com/office/powerpoint/2010/main" val="1429256966"/>
       </p:ext>
     </p:extLst>
   </p:cSld>
@@ -1545,48 +1579,9 @@
           <a:bodyPr/>
           <a:lstStyle/>
           <a:p>
-            <a:pPr marL="0" marR="0" lvl="0" indent="0" algn="l" defTabSz="914400" rtl="0" eaLnBrk="1" fontAlgn="auto" latinLnBrk="0" hangingPunct="1">
-              <a:lnSpc>
-                <a:spcPct val="100000"/>
-              </a:lnSpc>
-              <a:spcBef>
-                <a:spcPts val="0"/>
-              </a:spcBef>
-              <a:spcAft>
-                <a:spcPts val="0"/>
-              </a:spcAft>
-              <a:buClrTx/>
-              <a:buSzTx/>
-              <a:buFontTx/>
-              <a:buNone/>
-              <a:tabLst/>
-              <a:defRPr/>
-            </a:pPr>
-            <a:r>
-              <a:rPr lang="en-US" sz="1200" b="1" dirty="0"/>
-              <a:t>Comparison with crop model outputs and analysis of the uncertainty associated to architecture parameters and spatial configuration</a:t>
-            </a:r>
-            <a:endParaRPr lang="en-US" dirty="0"/>
-          </a:p>
-          <a:p>
-            <a:endParaRPr lang="en-US" dirty="0"/>
-          </a:p>
-          <a:p>
             <a:r>
               <a:rPr lang="en-US" dirty="0"/>
-              <a:t>Allometries to restrain morphological space (to what extent)</a:t>
-            </a:r>
-          </a:p>
-          <a:p>
-            <a:r>
-              <a:rPr lang="en-US" dirty="0"/>
-              <a:t>Test crop model hypotheses</a:t>
-            </a:r>
-          </a:p>
-          <a:p>
-            <a:r>
-              <a:rPr lang="en-US" dirty="0"/>
-              <a:t>Which parameters (+1 slide)</a:t>
+              <a:t>varying within species-specific range</a:t>
             </a:r>
           </a:p>
         </p:txBody>
@@ -1617,7 +1612,7 @@
     </p:spTree>
     <p:extLst>
       <p:ext uri="{BB962C8B-B14F-4D97-AF65-F5344CB8AC3E}">
-        <p14:creationId xmlns:p14="http://schemas.microsoft.com/office/powerpoint/2010/main" val="484345197"/>
+        <p14:creationId xmlns:p14="http://schemas.microsoft.com/office/powerpoint/2010/main" val="1375912186"/>
       </p:ext>
     </p:extLst>
   </p:cSld>
@@ -1743,7 +1738,7 @@
     </p:spTree>
     <p:extLst>
       <p:ext uri="{BB962C8B-B14F-4D97-AF65-F5344CB8AC3E}">
-        <p14:creationId xmlns:p14="http://schemas.microsoft.com/office/powerpoint/2010/main" val="4205552504"/>
+        <p14:creationId xmlns:p14="http://schemas.microsoft.com/office/powerpoint/2010/main" val="484345197"/>
       </p:ext>
     </p:extLst>
   </p:cSld>
@@ -1869,7 +1864,7 @@
     </p:spTree>
     <p:extLst>
       <p:ext uri="{BB962C8B-B14F-4D97-AF65-F5344CB8AC3E}">
-        <p14:creationId xmlns:p14="http://schemas.microsoft.com/office/powerpoint/2010/main" val="3866557221"/>
+        <p14:creationId xmlns:p14="http://schemas.microsoft.com/office/powerpoint/2010/main" val="4205552504"/>
       </p:ext>
     </p:extLst>
   </p:cSld>
@@ -1976,6 +1971,132 @@
     <p:extLst>
       <p:ext uri="{BB962C8B-B14F-4D97-AF65-F5344CB8AC3E}">
         <p14:creationId xmlns:p14="http://schemas.microsoft.com/office/powerpoint/2010/main" val="563112425"/>
+      </p:ext>
+    </p:extLst>
+  </p:cSld>
+  <p:clrMapOvr>
+    <a:masterClrMapping/>
+  </p:clrMapOvr>
+</p:notes>
+</file>
+
+<file path=ppt/notesSlides/notesSlide20.xml><?xml version="1.0" encoding="utf-8"?>
+<p:notes xmlns:a="http://schemas.openxmlformats.org/drawingml/2006/main" xmlns:r="http://schemas.openxmlformats.org/officeDocument/2006/relationships" xmlns:p="http://schemas.openxmlformats.org/presentationml/2006/main">
+  <p:cSld>
+    <p:spTree>
+      <p:nvGrpSpPr>
+        <p:cNvPr id="1" name=""/>
+        <p:cNvGrpSpPr/>
+        <p:nvPr/>
+      </p:nvGrpSpPr>
+      <p:grpSpPr>
+        <a:xfrm>
+          <a:off x="0" y="0"/>
+          <a:ext cx="0" cy="0"/>
+          <a:chOff x="0" y="0"/>
+          <a:chExt cx="0" cy="0"/>
+        </a:xfrm>
+      </p:grpSpPr>
+      <p:sp>
+        <p:nvSpPr>
+          <p:cNvPr id="2" name="Slide Image Placeholder 1"/>
+          <p:cNvSpPr>
+            <a:spLocks noGrp="1" noRot="1" noChangeAspect="1"/>
+          </p:cNvSpPr>
+          <p:nvPr>
+            <p:ph type="sldImg"/>
+          </p:nvPr>
+        </p:nvSpPr>
+        <p:spPr/>
+      </p:sp>
+      <p:sp>
+        <p:nvSpPr>
+          <p:cNvPr id="3" name="Notes Placeholder 2"/>
+          <p:cNvSpPr>
+            <a:spLocks noGrp="1"/>
+          </p:cNvSpPr>
+          <p:nvPr>
+            <p:ph type="body" idx="1"/>
+          </p:nvPr>
+        </p:nvSpPr>
+        <p:spPr/>
+        <p:txBody>
+          <a:bodyPr/>
+          <a:lstStyle/>
+          <a:p>
+            <a:pPr marL="0" marR="0" lvl="0" indent="0" algn="l" defTabSz="914400" rtl="0" eaLnBrk="1" fontAlgn="auto" latinLnBrk="0" hangingPunct="1">
+              <a:lnSpc>
+                <a:spcPct val="100000"/>
+              </a:lnSpc>
+              <a:spcBef>
+                <a:spcPts val="0"/>
+              </a:spcBef>
+              <a:spcAft>
+                <a:spcPts val="0"/>
+              </a:spcAft>
+              <a:buClrTx/>
+              <a:buSzTx/>
+              <a:buFontTx/>
+              <a:buNone/>
+              <a:tabLst/>
+              <a:defRPr/>
+            </a:pPr>
+            <a:r>
+              <a:rPr lang="en-US" sz="1200" b="1" dirty="0"/>
+              <a:t>Comparison with crop model outputs and analysis of the uncertainty associated to architecture parameters and spatial configuration</a:t>
+            </a:r>
+            <a:endParaRPr lang="en-US" dirty="0"/>
+          </a:p>
+          <a:p>
+            <a:endParaRPr lang="en-US" dirty="0"/>
+          </a:p>
+          <a:p>
+            <a:r>
+              <a:rPr lang="en-US" dirty="0"/>
+              <a:t>Allometries to restrain morphological space (to what extent)</a:t>
+            </a:r>
+          </a:p>
+          <a:p>
+            <a:r>
+              <a:rPr lang="en-US" dirty="0"/>
+              <a:t>Test crop model hypotheses</a:t>
+            </a:r>
+          </a:p>
+          <a:p>
+            <a:r>
+              <a:rPr lang="en-US" dirty="0"/>
+              <a:t>Which parameters (+1 slide)</a:t>
+            </a:r>
+          </a:p>
+        </p:txBody>
+      </p:sp>
+      <p:sp>
+        <p:nvSpPr>
+          <p:cNvPr id="4" name="Slide Number Placeholder 3"/>
+          <p:cNvSpPr>
+            <a:spLocks noGrp="1"/>
+          </p:cNvSpPr>
+          <p:nvPr>
+            <p:ph type="sldNum" sz="quarter" idx="5"/>
+          </p:nvPr>
+        </p:nvSpPr>
+        <p:spPr/>
+        <p:txBody>
+          <a:bodyPr/>
+          <a:lstStyle/>
+          <a:p>
+            <a:fld id="{A9A0A799-F059-4133-8369-1F74AA1BF689}" type="slidenum">
+              <a:rPr lang="en-US" smtClean="0"/>
+              <a:t>21</a:t>
+            </a:fld>
+            <a:endParaRPr lang="en-US"/>
+          </a:p>
+        </p:txBody>
+      </p:sp>
+    </p:spTree>
+    <p:extLst>
+      <p:ext uri="{BB962C8B-B14F-4D97-AF65-F5344CB8AC3E}">
+        <p14:creationId xmlns:p14="http://schemas.microsoft.com/office/powerpoint/2010/main" val="3866557221"/>
       </p:ext>
     </p:extLst>
   </p:cSld>
@@ -2851,43 +2972,34 @@
           <a:bodyPr/>
           <a:lstStyle/>
           <a:p>
-            <a:r>
-              <a:rPr lang="en-US" dirty="0"/>
-              <a:t>For a given process, for intercrops, what scale is the most relevant ?</a:t>
-            </a:r>
-          </a:p>
-          <a:p>
-            <a:r>
-              <a:rPr lang="en-US" dirty="0"/>
-              <a:t>C1: how to create an equivalent of a crop model simulation, but </a:t>
-            </a:r>
-            <a:r>
-              <a:rPr lang="en-US" dirty="0" err="1"/>
-              <a:t>architectured</a:t>
-            </a:r>
-            <a:r>
-              <a:rPr lang="en-US" dirty="0"/>
-              <a:t> ?</a:t>
-            </a:r>
-          </a:p>
-          <a:p>
-            <a:r>
-              <a:rPr lang="en-US" dirty="0"/>
-              <a:t>Peng 2020</a:t>
-            </a:r>
-          </a:p>
-          <a:p>
-            <a:endParaRPr lang="fr-FR" dirty="0"/>
-          </a:p>
-          <a:p>
+            <a:pPr marL="0" marR="0" lvl="0" indent="0" algn="l" defTabSz="914400" rtl="0" eaLnBrk="1" fontAlgn="auto" latinLnBrk="0" hangingPunct="1">
+              <a:lnSpc>
+                <a:spcPct val="100000"/>
+              </a:lnSpc>
+              <a:spcBef>
+                <a:spcPts val="0"/>
+              </a:spcBef>
+              <a:spcAft>
+                <a:spcPts val="0"/>
+              </a:spcAft>
+              <a:buClrTx/>
+              <a:buSzTx/>
+              <a:buFontTx/>
+              <a:buNone/>
+              <a:tabLst/>
+              <a:defRPr/>
+            </a:pPr>
             <a:r>
               <a:rPr lang="fr-FR" dirty="0"/>
-              <a:t>M</a:t>
-            </a:r>
-            <a:r>
-              <a:rPr lang="en-US" dirty="0"/>
-              <a:t>ix with previous slide</a:t>
-            </a:r>
+              <a:t>Maintenant on peut se demander comment on pourrait s’y prendre pour tirer le meilleur de chaque approche pour modéliser les cultures en mélange ?</a:t>
+            </a:r>
+          </a:p>
+          <a:p>
+            <a:r>
+              <a:rPr lang="fr-FR" dirty="0"/>
+              <a:t>Certains travaux se sont déjà attachés, processus par processus, à </a:t>
+            </a:r>
+            <a:endParaRPr lang="en-US" dirty="0"/>
           </a:p>
         </p:txBody>
       </p:sp>
@@ -2917,7 +3029,7 @@
     </p:spTree>
     <p:extLst>
       <p:ext uri="{BB962C8B-B14F-4D97-AF65-F5344CB8AC3E}">
-        <p14:creationId xmlns:p14="http://schemas.microsoft.com/office/powerpoint/2010/main" val="2679189549"/>
+        <p14:creationId xmlns:p14="http://schemas.microsoft.com/office/powerpoint/2010/main" val="3823378511"/>
       </p:ext>
     </p:extLst>
   </p:cSld>
@@ -3037,7 +3149,7 @@
     </p:spTree>
     <p:extLst>
       <p:ext uri="{BB962C8B-B14F-4D97-AF65-F5344CB8AC3E}">
-        <p14:creationId xmlns:p14="http://schemas.microsoft.com/office/powerpoint/2010/main" val="2124036290"/>
+        <p14:creationId xmlns:p14="http://schemas.microsoft.com/office/powerpoint/2010/main" val="2679189549"/>
       </p:ext>
     </p:extLst>
   </p:cSld>
@@ -3176,7 +3288,7 @@
           <a:p>
             <a:fld id="{0C939681-64E9-4ED9-A4D7-2B0751918A9B}" type="datetime1">
               <a:rPr lang="fr-FR" smtClean="0"/>
-              <a:t>06/11/2024</a:t>
+              <a:t>19/11/2024</a:t>
             </a:fld>
             <a:endParaRPr lang="fr-FR"/>
           </a:p>
@@ -3344,7 +3456,7 @@
           <a:p>
             <a:fld id="{C188FBEE-F816-42FF-9376-FE7E35860987}" type="datetime1">
               <a:rPr lang="fr-FR" smtClean="0"/>
-              <a:t>06/11/2024</a:t>
+              <a:t>19/11/2024</a:t>
             </a:fld>
             <a:endParaRPr lang="fr-FR"/>
           </a:p>
@@ -3522,7 +3634,7 @@
           <a:p>
             <a:fld id="{174ABB49-665E-4EE2-8EBF-FE4A452697D3}" type="datetime1">
               <a:rPr lang="fr-FR" smtClean="0"/>
-              <a:t>06/11/2024</a:t>
+              <a:t>19/11/2024</a:t>
             </a:fld>
             <a:endParaRPr lang="fr-FR"/>
           </a:p>
@@ -3690,7 +3802,7 @@
           <a:p>
             <a:fld id="{8811C267-FB5B-4DB2-8120-94FB1295D495}" type="datetime1">
               <a:rPr lang="fr-FR" smtClean="0"/>
-              <a:t>06/11/2024</a:t>
+              <a:t>19/11/2024</a:t>
             </a:fld>
             <a:endParaRPr lang="fr-FR"/>
           </a:p>
@@ -3935,7 +4047,7 @@
           <a:p>
             <a:fld id="{8BEDAEE3-F550-4433-89BF-DB1C91B4E694}" type="datetime1">
               <a:rPr lang="fr-FR" smtClean="0"/>
-              <a:t>06/11/2024</a:t>
+              <a:t>19/11/2024</a:t>
             </a:fld>
             <a:endParaRPr lang="fr-FR"/>
           </a:p>
@@ -4164,7 +4276,7 @@
           <a:p>
             <a:fld id="{875EFE55-6C38-4F83-92CA-E17D1080EAD0}" type="datetime1">
               <a:rPr lang="fr-FR" smtClean="0"/>
-              <a:t>06/11/2024</a:t>
+              <a:t>19/11/2024</a:t>
             </a:fld>
             <a:endParaRPr lang="fr-FR"/>
           </a:p>
@@ -4528,7 +4640,7 @@
           <a:p>
             <a:fld id="{C24B4F1F-1D19-4EA3-900F-F158BF65E775}" type="datetime1">
               <a:rPr lang="fr-FR" smtClean="0"/>
-              <a:t>06/11/2024</a:t>
+              <a:t>19/11/2024</a:t>
             </a:fld>
             <a:endParaRPr lang="fr-FR"/>
           </a:p>
@@ -4645,7 +4757,7 @@
           <a:p>
             <a:fld id="{9347C87F-7D11-4D7B-B186-AEDF7BACC549}" type="datetime1">
               <a:rPr lang="fr-FR" smtClean="0"/>
-              <a:t>06/11/2024</a:t>
+              <a:t>19/11/2024</a:t>
             </a:fld>
             <a:endParaRPr lang="fr-FR"/>
           </a:p>
@@ -4740,7 +4852,7 @@
           <a:p>
             <a:fld id="{30B461FB-6D13-494D-89E1-4530981B7536}" type="datetime1">
               <a:rPr lang="fr-FR" smtClean="0"/>
-              <a:t>06/11/2024</a:t>
+              <a:t>19/11/2024</a:t>
             </a:fld>
             <a:endParaRPr lang="fr-FR"/>
           </a:p>
@@ -5015,7 +5127,7 @@
           <a:p>
             <a:fld id="{D2CEF9DF-4A39-43ED-BE68-EB63D76CFF37}" type="datetime1">
               <a:rPr lang="fr-FR" smtClean="0"/>
-              <a:t>06/11/2024</a:t>
+              <a:t>19/11/2024</a:t>
             </a:fld>
             <a:endParaRPr lang="fr-FR"/>
           </a:p>
@@ -5267,7 +5379,7 @@
           <a:p>
             <a:fld id="{12BA0CB7-2A57-4841-B602-02CB78CDF575}" type="datetime1">
               <a:rPr lang="fr-FR" smtClean="0"/>
-              <a:t>06/11/2024</a:t>
+              <a:t>19/11/2024</a:t>
             </a:fld>
             <a:endParaRPr lang="fr-FR"/>
           </a:p>
@@ -5478,7 +5590,7 @@
           <a:p>
             <a:fld id="{E72661C0-4019-4DF0-85FA-478C82BAF507}" type="datetime1">
               <a:rPr lang="fr-FR" smtClean="0"/>
-              <a:t>06/11/2024</a:t>
+              <a:t>19/11/2024</a:t>
             </a:fld>
             <a:endParaRPr lang="fr-FR"/>
           </a:p>
@@ -7823,6 +7935,346 @@
       </p:grpSpPr>
       <p:sp>
         <p:nvSpPr>
+          <p:cNvPr id="15" name="Rectangle: Rounded Corners 14">
+            <a:extLst>
+              <a:ext uri="{FF2B5EF4-FFF2-40B4-BE49-F238E27FC236}">
+                <a16:creationId xmlns:a16="http://schemas.microsoft.com/office/drawing/2014/main" id="{5807CF0F-B1FE-4895-A46C-A70E498E4EDC}"/>
+              </a:ext>
+            </a:extLst>
+          </p:cNvPr>
+          <p:cNvSpPr/>
+          <p:nvPr/>
+        </p:nvSpPr>
+        <p:spPr>
+          <a:xfrm>
+            <a:off x="307908" y="2304661"/>
+            <a:ext cx="3699346" cy="4319683"/>
+          </a:xfrm>
+          <a:prstGeom prst="roundRect">
+            <a:avLst/>
+          </a:prstGeom>
+          <a:solidFill>
+            <a:srgbClr val="399758">
+              <a:alpha val="69804"/>
+            </a:srgbClr>
+          </a:solidFill>
+          <a:ln>
+            <a:solidFill>
+              <a:srgbClr val="399758"/>
+            </a:solidFill>
+          </a:ln>
+        </p:spPr>
+        <p:style>
+          <a:lnRef idx="2">
+            <a:schemeClr val="accent2">
+              <a:shade val="50000"/>
+            </a:schemeClr>
+          </a:lnRef>
+          <a:fillRef idx="1">
+            <a:schemeClr val="accent2"/>
+          </a:fillRef>
+          <a:effectRef idx="0">
+            <a:schemeClr val="accent2"/>
+          </a:effectRef>
+          <a:fontRef idx="minor">
+            <a:schemeClr val="lt1"/>
+          </a:fontRef>
+        </p:style>
+        <p:txBody>
+          <a:bodyPr rtlCol="0" anchor="ctr"/>
+          <a:lstStyle/>
+          <a:p>
+            <a:pPr algn="ctr"/>
+            <a:endParaRPr lang="en-US" dirty="0"/>
+          </a:p>
+        </p:txBody>
+      </p:sp>
+      <p:sp>
+        <p:nvSpPr>
+          <p:cNvPr id="2" name="Titre 1">
+            <a:extLst>
+              <a:ext uri="{FF2B5EF4-FFF2-40B4-BE49-F238E27FC236}">
+                <a16:creationId xmlns:a16="http://schemas.microsoft.com/office/drawing/2014/main" id="{E9057B95-F35D-C693-AE48-F6224EB5BCA4}"/>
+              </a:ext>
+            </a:extLst>
+          </p:cNvPr>
+          <p:cNvSpPr>
+            <a:spLocks noGrp="1"/>
+          </p:cNvSpPr>
+          <p:nvPr>
+            <p:ph type="title"/>
+          </p:nvPr>
+        </p:nvSpPr>
+        <p:spPr>
+          <a:xfrm>
+            <a:off x="399548" y="389"/>
+            <a:ext cx="10515600" cy="1325563"/>
+          </a:xfrm>
+        </p:spPr>
+        <p:txBody>
+          <a:bodyPr>
+            <a:normAutofit/>
+          </a:bodyPr>
+          <a:lstStyle/>
+          <a:p>
+            <a:r>
+              <a:rPr lang="fr-FR" sz="3600" dirty="0" err="1"/>
+              <a:t>My</a:t>
+            </a:r>
+            <a:r>
+              <a:rPr lang="fr-FR" sz="3600" dirty="0"/>
+              <a:t> PhD : </a:t>
+            </a:r>
+            <a:r>
+              <a:rPr lang="fr-FR" sz="2800" dirty="0" err="1"/>
+              <a:t>Multiscale</a:t>
+            </a:r>
+            <a:r>
+              <a:rPr lang="fr-FR" sz="2800" dirty="0"/>
+              <a:t> </a:t>
+            </a:r>
+            <a:r>
+              <a:rPr lang="fr-FR" sz="2800" dirty="0" err="1"/>
+              <a:t>hybrid</a:t>
+            </a:r>
+            <a:r>
+              <a:rPr lang="fr-FR" sz="2800" dirty="0"/>
+              <a:t> </a:t>
+            </a:r>
+            <a:r>
+              <a:rPr lang="fr-FR" sz="2800" dirty="0" err="1"/>
+              <a:t>modelling</a:t>
+            </a:r>
+            <a:r>
+              <a:rPr lang="fr-FR" sz="2800" dirty="0"/>
+              <a:t> for </a:t>
+            </a:r>
+            <a:r>
+              <a:rPr lang="fr-FR" sz="2800" dirty="0" err="1"/>
+              <a:t>intercrops</a:t>
+            </a:r>
+            <a:r>
+              <a:rPr lang="fr-FR" sz="2800" dirty="0"/>
+              <a:t> </a:t>
+            </a:r>
+          </a:p>
+        </p:txBody>
+      </p:sp>
+      <p:sp>
+        <p:nvSpPr>
+          <p:cNvPr id="3" name="Espace réservé du contenu 2">
+            <a:extLst>
+              <a:ext uri="{FF2B5EF4-FFF2-40B4-BE49-F238E27FC236}">
+                <a16:creationId xmlns:a16="http://schemas.microsoft.com/office/drawing/2014/main" id="{7D8CCA93-EA18-4579-6817-2FB13627CCFE}"/>
+              </a:ext>
+            </a:extLst>
+          </p:cNvPr>
+          <p:cNvSpPr>
+            <a:spLocks noGrp="1"/>
+          </p:cNvSpPr>
+          <p:nvPr>
+            <p:ph idx="1"/>
+          </p:nvPr>
+        </p:nvSpPr>
+        <p:spPr>
+          <a:xfrm>
+            <a:off x="510149" y="2541726"/>
+            <a:ext cx="3296102" cy="4082618"/>
+          </a:xfrm>
+        </p:spPr>
+        <p:txBody>
+          <a:bodyPr>
+            <a:normAutofit lnSpcReduction="10000"/>
+          </a:bodyPr>
+          <a:lstStyle/>
+          <a:p>
+            <a:pPr marL="0" indent="0">
+              <a:buNone/>
+            </a:pPr>
+            <a:r>
+              <a:rPr lang="fr-FR" b="1" dirty="0" err="1"/>
+              <a:t>Chapter</a:t>
+            </a:r>
+            <a:r>
+              <a:rPr lang="fr-FR" b="1" dirty="0"/>
+              <a:t> I </a:t>
+            </a:r>
+          </a:p>
+          <a:p>
+            <a:pPr marL="0" indent="0">
+              <a:buNone/>
+            </a:pPr>
+            <a:r>
+              <a:rPr lang="fr-FR" sz="2400" dirty="0" err="1"/>
+              <a:t>ArchiCrop</a:t>
+            </a:r>
+            <a:r>
+              <a:rPr lang="fr-FR" sz="2400" dirty="0"/>
+              <a:t>, </a:t>
+            </a:r>
+            <a:br>
+              <a:rPr lang="fr-FR" sz="2400" dirty="0"/>
+            </a:br>
+            <a:r>
+              <a:rPr lang="fr-FR" sz="2400" dirty="0"/>
+              <a:t>a 3D </a:t>
+            </a:r>
+            <a:r>
+              <a:rPr lang="fr-FR" sz="2400" dirty="0" err="1"/>
+              <a:t>dynamic</a:t>
+            </a:r>
+            <a:r>
+              <a:rPr lang="fr-FR" sz="2400" dirty="0"/>
+              <a:t> </a:t>
+            </a:r>
+            <a:r>
+              <a:rPr lang="fr-FR" sz="2400" dirty="0" err="1"/>
+              <a:t>parametric</a:t>
+            </a:r>
+            <a:r>
+              <a:rPr lang="fr-FR" sz="2400" dirty="0"/>
+              <a:t> model </a:t>
+            </a:r>
+          </a:p>
+          <a:p>
+            <a:pPr marL="0" indent="0">
+              <a:buNone/>
+            </a:pPr>
+            <a:endParaRPr lang="fr-FR" sz="2400" dirty="0"/>
+          </a:p>
+          <a:p>
+            <a:pPr marL="0" indent="0">
+              <a:buNone/>
+            </a:pPr>
+            <a:r>
+              <a:rPr lang="en-US" sz="2400" i="1" dirty="0"/>
+              <a:t>How to conceive a </a:t>
+            </a:r>
+            <a:r>
+              <a:rPr lang="en-US" sz="2400" b="1" i="1" dirty="0"/>
+              <a:t>3D plant model</a:t>
+            </a:r>
+            <a:r>
+              <a:rPr lang="en-US" sz="2400" i="1" dirty="0"/>
+              <a:t> with </a:t>
+            </a:r>
+            <a:r>
+              <a:rPr lang="en-US" sz="2400" b="1" i="1" dirty="0"/>
+              <a:t>few architectural and developmental parameters </a:t>
+            </a:r>
+            <a:r>
+              <a:rPr lang="en-US" sz="2400" i="1" dirty="0"/>
+              <a:t>and with a canopy-scale </a:t>
+            </a:r>
+            <a:r>
+              <a:rPr lang="en-US" sz="2400" b="1" i="1" dirty="0"/>
+              <a:t>constraint on growth </a:t>
+            </a:r>
+            <a:r>
+              <a:rPr lang="en-US" sz="2400" i="1" dirty="0"/>
+              <a:t>? </a:t>
+            </a:r>
+          </a:p>
+        </p:txBody>
+      </p:sp>
+      <p:sp>
+        <p:nvSpPr>
+          <p:cNvPr id="9" name="TextBox 8">
+            <a:extLst>
+              <a:ext uri="{FF2B5EF4-FFF2-40B4-BE49-F238E27FC236}">
+                <a16:creationId xmlns:a16="http://schemas.microsoft.com/office/drawing/2014/main" id="{4B023A90-5157-4005-A976-38BB0A6FFD60}"/>
+              </a:ext>
+            </a:extLst>
+          </p:cNvPr>
+          <p:cNvSpPr txBox="1"/>
+          <p:nvPr/>
+        </p:nvSpPr>
+        <p:spPr>
+          <a:xfrm>
+            <a:off x="1261993" y="1068530"/>
+            <a:ext cx="9555989" cy="954107"/>
+          </a:xfrm>
+          <a:prstGeom prst="rect">
+            <a:avLst/>
+          </a:prstGeom>
+          <a:noFill/>
+        </p:spPr>
+        <p:txBody>
+          <a:bodyPr wrap="square" rtlCol="0">
+            <a:spAutoFit/>
+          </a:bodyPr>
+          <a:lstStyle/>
+          <a:p>
+            <a:pPr algn="ctr"/>
+            <a:r>
+              <a:rPr lang="en-US" sz="2800" i="1" dirty="0"/>
+              <a:t>For given processes, what in plant architecture should we consider in intercrop models?</a:t>
+            </a:r>
+            <a:endParaRPr lang="fr-FR" sz="2800" i="1" dirty="0"/>
+          </a:p>
+        </p:txBody>
+      </p:sp>
+      <p:sp>
+        <p:nvSpPr>
+          <p:cNvPr id="10" name="Slide Number Placeholder 9">
+            <a:extLst>
+              <a:ext uri="{FF2B5EF4-FFF2-40B4-BE49-F238E27FC236}">
+                <a16:creationId xmlns:a16="http://schemas.microsoft.com/office/drawing/2014/main" id="{B067720C-0A92-4BD7-8CEE-EB4786CC39DA}"/>
+              </a:ext>
+            </a:extLst>
+          </p:cNvPr>
+          <p:cNvSpPr>
+            <a:spLocks noGrp="1"/>
+          </p:cNvSpPr>
+          <p:nvPr>
+            <p:ph type="sldNum" sz="quarter" idx="12"/>
+          </p:nvPr>
+        </p:nvSpPr>
+        <p:spPr/>
+        <p:txBody>
+          <a:bodyPr/>
+          <a:lstStyle/>
+          <a:p>
+            <a:fld id="{27C6CCC6-2BE5-4E42-96A4-D1E8E81A3D8E}" type="slidenum">
+              <a:rPr lang="fr-FR" smtClean="0"/>
+              <a:t>10</a:t>
+            </a:fld>
+            <a:endParaRPr lang="fr-FR" dirty="0"/>
+          </a:p>
+        </p:txBody>
+      </p:sp>
+    </p:spTree>
+    <p:extLst>
+      <p:ext uri="{BB962C8B-B14F-4D97-AF65-F5344CB8AC3E}">
+        <p14:creationId xmlns:p14="http://schemas.microsoft.com/office/powerpoint/2010/main" val="2932026329"/>
+      </p:ext>
+    </p:extLst>
+  </p:cSld>
+  <p:clrMapOvr>
+    <a:masterClrMapping/>
+  </p:clrMapOvr>
+</p:sld>
+</file>
+
+<file path=ppt/slides/slide11.xml><?xml version="1.0" encoding="utf-8"?>
+<p:sld xmlns:a="http://schemas.openxmlformats.org/drawingml/2006/main" xmlns:r="http://schemas.openxmlformats.org/officeDocument/2006/relationships" xmlns:p="http://schemas.openxmlformats.org/presentationml/2006/main">
+  <p:cSld>
+    <p:spTree>
+      <p:nvGrpSpPr>
+        <p:cNvPr id="1" name=""/>
+        <p:cNvGrpSpPr/>
+        <p:nvPr/>
+      </p:nvGrpSpPr>
+      <p:grpSpPr>
+        <a:xfrm>
+          <a:off x="0" y="0"/>
+          <a:ext cx="0" cy="0"/>
+          <a:chOff x="0" y="0"/>
+          <a:chExt cx="0" cy="0"/>
+        </a:xfrm>
+      </p:grpSpPr>
+      <p:sp>
+        <p:nvSpPr>
           <p:cNvPr id="16" name="Rectangle: Rounded Corners 15">
             <a:extLst>
               <a:ext uri="{FF2B5EF4-FFF2-40B4-BE49-F238E27FC236}">
@@ -8506,7 +8958,7 @@
           <a:p>
             <a:fld id="{27C6CCC6-2BE5-4E42-96A4-D1E8E81A3D8E}" type="slidenum">
               <a:rPr lang="fr-FR" smtClean="0"/>
-              <a:t>10</a:t>
+              <a:t>11</a:t>
             </a:fld>
             <a:endParaRPr lang="fr-FR" dirty="0"/>
           </a:p>
@@ -8525,7 +8977,7 @@
 </p:sld>
 </file>
 
-<file path=ppt/slides/slide11.xml><?xml version="1.0" encoding="utf-8"?>
+<file path=ppt/slides/slide12.xml><?xml version="1.0" encoding="utf-8"?>
 <p:sld xmlns:a="http://schemas.openxmlformats.org/drawingml/2006/main" xmlns:r="http://schemas.openxmlformats.org/officeDocument/2006/relationships" xmlns:p="http://schemas.openxmlformats.org/presentationml/2006/main">
   <p:cSld>
     <p:spTree>
@@ -9615,7 +10067,7 @@
           <a:p>
             <a:fld id="{27C6CCC6-2BE5-4E42-96A4-D1E8E81A3D8E}" type="slidenum">
               <a:rPr lang="fr-FR" smtClean="0"/>
-              <a:t>11</a:t>
+              <a:t>12</a:t>
             </a:fld>
             <a:endParaRPr lang="fr-FR" dirty="0"/>
           </a:p>
@@ -9625,255 +10077,6 @@
     <p:extLst>
       <p:ext uri="{BB962C8B-B14F-4D97-AF65-F5344CB8AC3E}">
         <p14:creationId xmlns:p14="http://schemas.microsoft.com/office/powerpoint/2010/main" val="3862449117"/>
-      </p:ext>
-    </p:extLst>
-  </p:cSld>
-  <p:clrMapOvr>
-    <a:masterClrMapping/>
-  </p:clrMapOvr>
-</p:sld>
-</file>
-
-<file path=ppt/slides/slide12.xml><?xml version="1.0" encoding="utf-8"?>
-<p:sld xmlns:a="http://schemas.openxmlformats.org/drawingml/2006/main" xmlns:r="http://schemas.openxmlformats.org/officeDocument/2006/relationships" xmlns:p="http://schemas.openxmlformats.org/presentationml/2006/main">
-  <p:cSld>
-    <p:spTree>
-      <p:nvGrpSpPr>
-        <p:cNvPr id="1" name=""/>
-        <p:cNvGrpSpPr/>
-        <p:nvPr/>
-      </p:nvGrpSpPr>
-      <p:grpSpPr>
-        <a:xfrm>
-          <a:off x="0" y="0"/>
-          <a:ext cx="0" cy="0"/>
-          <a:chOff x="0" y="0"/>
-          <a:chExt cx="0" cy="0"/>
-        </a:xfrm>
-      </p:grpSpPr>
-      <p:sp>
-        <p:nvSpPr>
-          <p:cNvPr id="2" name="Title 1">
-            <a:extLst>
-              <a:ext uri="{FF2B5EF4-FFF2-40B4-BE49-F238E27FC236}">
-                <a16:creationId xmlns:a16="http://schemas.microsoft.com/office/drawing/2014/main" id="{FC5581FA-004F-49DF-9962-F77C7BBF4FB0}"/>
-              </a:ext>
-            </a:extLst>
-          </p:cNvPr>
-          <p:cNvSpPr>
-            <a:spLocks noGrp="1"/>
-          </p:cNvSpPr>
-          <p:nvPr>
-            <p:ph type="title"/>
-          </p:nvPr>
-        </p:nvSpPr>
-        <p:spPr>
-          <a:xfrm>
-            <a:off x="663938" y="170395"/>
-            <a:ext cx="10515600" cy="1325563"/>
-          </a:xfrm>
-        </p:spPr>
-        <p:txBody>
-          <a:bodyPr>
-            <a:normAutofit/>
-          </a:bodyPr>
-          <a:lstStyle/>
-          <a:p>
-            <a:r>
-              <a:rPr lang="en-US" sz="4000" dirty="0"/>
-              <a:t>SPPM: Structural Parametric Plant Model</a:t>
-            </a:r>
-          </a:p>
-        </p:txBody>
-      </p:sp>
-      <p:sp>
-        <p:nvSpPr>
-          <p:cNvPr id="3" name="Content Placeholder 2">
-            <a:extLst>
-              <a:ext uri="{FF2B5EF4-FFF2-40B4-BE49-F238E27FC236}">
-                <a16:creationId xmlns:a16="http://schemas.microsoft.com/office/drawing/2014/main" id="{F64A4EC1-5752-4617-A145-D55DD48A7683}"/>
-              </a:ext>
-            </a:extLst>
-          </p:cNvPr>
-          <p:cNvSpPr>
-            <a:spLocks noGrp="1"/>
-          </p:cNvSpPr>
-          <p:nvPr>
-            <p:ph idx="1"/>
-          </p:nvPr>
-        </p:nvSpPr>
-        <p:spPr>
-          <a:xfrm>
-            <a:off x="663939" y="1495958"/>
-            <a:ext cx="8799038" cy="2703902"/>
-          </a:xfrm>
-        </p:spPr>
-        <p:txBody>
-          <a:bodyPr>
-            <a:normAutofit fontScale="92500" lnSpcReduction="10000"/>
-          </a:bodyPr>
-          <a:lstStyle/>
-          <a:p>
-            <a:r>
-              <a:rPr lang="en-US" dirty="0"/>
-              <a:t>Plant </a:t>
-            </a:r>
-            <a:r>
-              <a:rPr lang="en-US" b="1" dirty="0"/>
-              <a:t>3D architecture </a:t>
-            </a:r>
-            <a:r>
-              <a:rPr lang="en-US" dirty="0"/>
-              <a:t>and </a:t>
-            </a:r>
-            <a:r>
-              <a:rPr lang="en-US" b="1" dirty="0"/>
-              <a:t>development</a:t>
-            </a:r>
-            <a:r>
-              <a:rPr lang="en-US" dirty="0"/>
-              <a:t> are defined by </a:t>
-            </a:r>
-            <a:r>
-              <a:rPr lang="en-US" b="1" dirty="0"/>
-              <a:t>parameters</a:t>
-            </a:r>
-            <a:r>
-              <a:rPr lang="en-US" dirty="0"/>
-              <a:t>.</a:t>
-            </a:r>
-          </a:p>
-          <a:p>
-            <a:endParaRPr lang="en-US" dirty="0"/>
-          </a:p>
-          <a:p>
-            <a:r>
-              <a:rPr lang="en-US" dirty="0"/>
-              <a:t>Few parameters </a:t>
-            </a:r>
-            <a:r>
-              <a:rPr lang="en-US" dirty="0">
-                <a:sym typeface="Wingdings" panose="05000000000000000000" pitchFamily="2" charset="2"/>
-              </a:rPr>
-              <a:t> </a:t>
-            </a:r>
-            <a:r>
-              <a:rPr lang="en-US" dirty="0"/>
-              <a:t>known </a:t>
-            </a:r>
-            <a:r>
-              <a:rPr lang="en-US" b="1" dirty="0"/>
-              <a:t>allometric laws </a:t>
-            </a:r>
-            <a:r>
-              <a:rPr lang="en-US" dirty="0"/>
-              <a:t>for potential plant</a:t>
-            </a:r>
-            <a:endParaRPr lang="en-US" sz="1900" dirty="0"/>
-          </a:p>
-          <a:p>
-            <a:endParaRPr lang="en-US" dirty="0"/>
-          </a:p>
-          <a:p>
-            <a:r>
-              <a:rPr lang="en-US" dirty="0"/>
-              <a:t>Explore morphological space</a:t>
-            </a:r>
-          </a:p>
-          <a:p>
-            <a:pPr marL="0" indent="0">
-              <a:buNone/>
-            </a:pPr>
-            <a:endParaRPr lang="en-US" dirty="0"/>
-          </a:p>
-        </p:txBody>
-      </p:sp>
-      <p:sp>
-        <p:nvSpPr>
-          <p:cNvPr id="6" name="Slide Number Placeholder 5">
-            <a:extLst>
-              <a:ext uri="{FF2B5EF4-FFF2-40B4-BE49-F238E27FC236}">
-                <a16:creationId xmlns:a16="http://schemas.microsoft.com/office/drawing/2014/main" id="{B01AA784-0F2C-4C78-A201-36238F926F07}"/>
-              </a:ext>
-            </a:extLst>
-          </p:cNvPr>
-          <p:cNvSpPr>
-            <a:spLocks noGrp="1"/>
-          </p:cNvSpPr>
-          <p:nvPr>
-            <p:ph type="sldNum" sz="quarter" idx="12"/>
-          </p:nvPr>
-        </p:nvSpPr>
-        <p:spPr/>
-        <p:txBody>
-          <a:bodyPr/>
-          <a:lstStyle/>
-          <a:p>
-            <a:fld id="{27C6CCC6-2BE5-4E42-96A4-D1E8E81A3D8E}" type="slidenum">
-              <a:rPr lang="fr-FR" smtClean="0"/>
-              <a:t>12</a:t>
-            </a:fld>
-            <a:endParaRPr lang="fr-FR"/>
-          </a:p>
-        </p:txBody>
-      </p:sp>
-      <p:sp>
-        <p:nvSpPr>
-          <p:cNvPr id="7" name="TextBox 6">
-            <a:extLst>
-              <a:ext uri="{FF2B5EF4-FFF2-40B4-BE49-F238E27FC236}">
-                <a16:creationId xmlns:a16="http://schemas.microsoft.com/office/drawing/2014/main" id="{4C4621C9-8171-4BA8-B2F3-6F3DDF1C7231}"/>
-              </a:ext>
-            </a:extLst>
-          </p:cNvPr>
-          <p:cNvSpPr txBox="1"/>
-          <p:nvPr/>
-        </p:nvSpPr>
-        <p:spPr>
-          <a:xfrm>
-            <a:off x="8672612" y="1421043"/>
-            <a:ext cx="2243471" cy="923330"/>
-          </a:xfrm>
-          <a:prstGeom prst="rect">
-            <a:avLst/>
-          </a:prstGeom>
-          <a:solidFill>
-            <a:schemeClr val="bg2">
-              <a:alpha val="60000"/>
-            </a:schemeClr>
-          </a:solidFill>
-          <a:ln>
-            <a:solidFill>
-              <a:schemeClr val="bg2">
-                <a:alpha val="60000"/>
-              </a:schemeClr>
-            </a:solidFill>
-          </a:ln>
-        </p:spPr>
-        <p:txBody>
-          <a:bodyPr wrap="square" rtlCol="0">
-            <a:spAutoFit/>
-          </a:bodyPr>
-          <a:lstStyle/>
-          <a:p>
-            <a:r>
-              <a:rPr lang="en-US" dirty="0">
-                <a:latin typeface="Arial" panose="020B0604020202020204" pitchFamily="34" charset="0"/>
-                <a:cs typeface="Arial" panose="020B0604020202020204" pitchFamily="34" charset="0"/>
-              </a:rPr>
-              <a:t>≠</a:t>
-            </a:r>
-            <a:r>
-              <a:rPr lang="en-US" dirty="0"/>
-              <a:t> FSPM: 3D plant architecture emerges from plant processes</a:t>
-            </a:r>
-          </a:p>
-        </p:txBody>
-      </p:sp>
-    </p:spTree>
-    <p:extLst>
-      <p:ext uri="{BB962C8B-B14F-4D97-AF65-F5344CB8AC3E}">
-        <p14:creationId xmlns:p14="http://schemas.microsoft.com/office/powerpoint/2010/main" val="1470009071"/>
       </p:ext>
     </p:extLst>
   </p:cSld>
@@ -9965,7 +10168,31 @@
           <a:p>
             <a:r>
               <a:rPr lang="en-US" dirty="0"/>
-              <a:t>Plant 3D architecture and development are defined by parameters.</a:t>
+              <a:t>Plant </a:t>
+            </a:r>
+            <a:r>
+              <a:rPr lang="en-US" b="1" dirty="0"/>
+              <a:t>3D architecture </a:t>
+            </a:r>
+            <a:r>
+              <a:rPr lang="en-US" dirty="0"/>
+              <a:t>and </a:t>
+            </a:r>
+            <a:r>
+              <a:rPr lang="en-US" b="1" dirty="0"/>
+              <a:t>development</a:t>
+            </a:r>
+            <a:r>
+              <a:rPr lang="en-US" dirty="0"/>
+              <a:t> are defined by </a:t>
+            </a:r>
+            <a:r>
+              <a:rPr lang="en-US" b="1" dirty="0"/>
+              <a:t>parameters</a:t>
+            </a:r>
+            <a:r>
+              <a:rPr lang="en-US" dirty="0"/>
+              <a:t>.</a:t>
             </a:r>
           </a:p>
           <a:p>
@@ -9984,8 +10211,17 @@
             </a:r>
             <a:r>
               <a:rPr lang="en-US" dirty="0"/>
-              <a:t>known allometric laws for potential plant </a:t>
-            </a:r>
+              <a:t>known </a:t>
+            </a:r>
+            <a:r>
+              <a:rPr lang="en-US" b="1" dirty="0"/>
+              <a:t>allometric laws </a:t>
+            </a:r>
+            <a:r>
+              <a:rPr lang="en-US" dirty="0"/>
+              <a:t>for potential plant</a:t>
+            </a:r>
+            <a:endParaRPr lang="en-US" sz="1900" dirty="0"/>
           </a:p>
           <a:p>
             <a:endParaRPr lang="en-US" dirty="0"/>
@@ -10028,6 +10264,222 @@
             <a:fld id="{27C6CCC6-2BE5-4E42-96A4-D1E8E81A3D8E}" type="slidenum">
               <a:rPr lang="fr-FR" smtClean="0"/>
               <a:t>13</a:t>
+            </a:fld>
+            <a:endParaRPr lang="fr-FR"/>
+          </a:p>
+        </p:txBody>
+      </p:sp>
+      <p:sp>
+        <p:nvSpPr>
+          <p:cNvPr id="7" name="TextBox 6">
+            <a:extLst>
+              <a:ext uri="{FF2B5EF4-FFF2-40B4-BE49-F238E27FC236}">
+                <a16:creationId xmlns:a16="http://schemas.microsoft.com/office/drawing/2014/main" id="{4C4621C9-8171-4BA8-B2F3-6F3DDF1C7231}"/>
+              </a:ext>
+            </a:extLst>
+          </p:cNvPr>
+          <p:cNvSpPr txBox="1"/>
+          <p:nvPr/>
+        </p:nvSpPr>
+        <p:spPr>
+          <a:xfrm>
+            <a:off x="8672612" y="1421043"/>
+            <a:ext cx="2243471" cy="923330"/>
+          </a:xfrm>
+          <a:prstGeom prst="rect">
+            <a:avLst/>
+          </a:prstGeom>
+          <a:solidFill>
+            <a:schemeClr val="bg2">
+              <a:alpha val="60000"/>
+            </a:schemeClr>
+          </a:solidFill>
+          <a:ln>
+            <a:solidFill>
+              <a:schemeClr val="bg2">
+                <a:alpha val="60000"/>
+              </a:schemeClr>
+            </a:solidFill>
+          </a:ln>
+        </p:spPr>
+        <p:txBody>
+          <a:bodyPr wrap="square" rtlCol="0">
+            <a:spAutoFit/>
+          </a:bodyPr>
+          <a:lstStyle/>
+          <a:p>
+            <a:r>
+              <a:rPr lang="en-US" dirty="0">
+                <a:latin typeface="Arial" panose="020B0604020202020204" pitchFamily="34" charset="0"/>
+                <a:cs typeface="Arial" panose="020B0604020202020204" pitchFamily="34" charset="0"/>
+              </a:rPr>
+              <a:t>≠</a:t>
+            </a:r>
+            <a:r>
+              <a:rPr lang="en-US" dirty="0"/>
+              <a:t> FSPM: 3D plant architecture emerges from plant processes</a:t>
+            </a:r>
+          </a:p>
+        </p:txBody>
+      </p:sp>
+    </p:spTree>
+    <p:extLst>
+      <p:ext uri="{BB962C8B-B14F-4D97-AF65-F5344CB8AC3E}">
+        <p14:creationId xmlns:p14="http://schemas.microsoft.com/office/powerpoint/2010/main" val="1470009071"/>
+      </p:ext>
+    </p:extLst>
+  </p:cSld>
+  <p:clrMapOvr>
+    <a:masterClrMapping/>
+  </p:clrMapOvr>
+</p:sld>
+</file>
+
+<file path=ppt/slides/slide14.xml><?xml version="1.0" encoding="utf-8"?>
+<p:sld xmlns:a="http://schemas.openxmlformats.org/drawingml/2006/main" xmlns:r="http://schemas.openxmlformats.org/officeDocument/2006/relationships" xmlns:p="http://schemas.openxmlformats.org/presentationml/2006/main">
+  <p:cSld>
+    <p:spTree>
+      <p:nvGrpSpPr>
+        <p:cNvPr id="1" name=""/>
+        <p:cNvGrpSpPr/>
+        <p:nvPr/>
+      </p:nvGrpSpPr>
+      <p:grpSpPr>
+        <a:xfrm>
+          <a:off x="0" y="0"/>
+          <a:ext cx="0" cy="0"/>
+          <a:chOff x="0" y="0"/>
+          <a:chExt cx="0" cy="0"/>
+        </a:xfrm>
+      </p:grpSpPr>
+      <p:sp>
+        <p:nvSpPr>
+          <p:cNvPr id="2" name="Title 1">
+            <a:extLst>
+              <a:ext uri="{FF2B5EF4-FFF2-40B4-BE49-F238E27FC236}">
+                <a16:creationId xmlns:a16="http://schemas.microsoft.com/office/drawing/2014/main" id="{FC5581FA-004F-49DF-9962-F77C7BBF4FB0}"/>
+              </a:ext>
+            </a:extLst>
+          </p:cNvPr>
+          <p:cNvSpPr>
+            <a:spLocks noGrp="1"/>
+          </p:cNvSpPr>
+          <p:nvPr>
+            <p:ph type="title"/>
+          </p:nvPr>
+        </p:nvSpPr>
+        <p:spPr>
+          <a:xfrm>
+            <a:off x="663938" y="170395"/>
+            <a:ext cx="10515600" cy="1325563"/>
+          </a:xfrm>
+        </p:spPr>
+        <p:txBody>
+          <a:bodyPr>
+            <a:normAutofit/>
+          </a:bodyPr>
+          <a:lstStyle/>
+          <a:p>
+            <a:r>
+              <a:rPr lang="en-US" sz="4000" dirty="0"/>
+              <a:t>SPPM: Structural Parametric Plant Model</a:t>
+            </a:r>
+          </a:p>
+        </p:txBody>
+      </p:sp>
+      <p:sp>
+        <p:nvSpPr>
+          <p:cNvPr id="3" name="Content Placeholder 2">
+            <a:extLst>
+              <a:ext uri="{FF2B5EF4-FFF2-40B4-BE49-F238E27FC236}">
+                <a16:creationId xmlns:a16="http://schemas.microsoft.com/office/drawing/2014/main" id="{F64A4EC1-5752-4617-A145-D55DD48A7683}"/>
+              </a:ext>
+            </a:extLst>
+          </p:cNvPr>
+          <p:cNvSpPr>
+            <a:spLocks noGrp="1"/>
+          </p:cNvSpPr>
+          <p:nvPr>
+            <p:ph idx="1"/>
+          </p:nvPr>
+        </p:nvSpPr>
+        <p:spPr>
+          <a:xfrm>
+            <a:off x="663939" y="1495958"/>
+            <a:ext cx="8799038" cy="2703902"/>
+          </a:xfrm>
+        </p:spPr>
+        <p:txBody>
+          <a:bodyPr>
+            <a:normAutofit fontScale="92500" lnSpcReduction="10000"/>
+          </a:bodyPr>
+          <a:lstStyle/>
+          <a:p>
+            <a:r>
+              <a:rPr lang="en-US" dirty="0"/>
+              <a:t>Plant 3D architecture and development are defined by parameters.</a:t>
+            </a:r>
+          </a:p>
+          <a:p>
+            <a:endParaRPr lang="en-US" dirty="0"/>
+          </a:p>
+          <a:p>
+            <a:r>
+              <a:rPr lang="en-US" dirty="0"/>
+              <a:t>Few parameters </a:t>
+            </a:r>
+            <a:r>
+              <a:rPr lang="en-US" dirty="0">
+                <a:sym typeface="Wingdings" panose="05000000000000000000" pitchFamily="2" charset="2"/>
+              </a:rPr>
+              <a:t> </a:t>
+            </a:r>
+            <a:r>
+              <a:rPr lang="en-US" dirty="0"/>
+              <a:t>known allometric laws for potential plant </a:t>
+            </a:r>
+          </a:p>
+          <a:p>
+            <a:endParaRPr lang="en-US" dirty="0"/>
+          </a:p>
+          <a:p>
+            <a:r>
+              <a:rPr lang="en-US" dirty="0"/>
+              <a:t>Explore morphological space</a:t>
+            </a:r>
+          </a:p>
+          <a:p>
+            <a:pPr marL="0" indent="0">
+              <a:buNone/>
+            </a:pPr>
+            <a:endParaRPr lang="en-US" dirty="0"/>
+          </a:p>
+        </p:txBody>
+      </p:sp>
+      <p:sp>
+        <p:nvSpPr>
+          <p:cNvPr id="6" name="Slide Number Placeholder 5">
+            <a:extLst>
+              <a:ext uri="{FF2B5EF4-FFF2-40B4-BE49-F238E27FC236}">
+                <a16:creationId xmlns:a16="http://schemas.microsoft.com/office/drawing/2014/main" id="{B01AA784-0F2C-4C78-A201-36238F926F07}"/>
+              </a:ext>
+            </a:extLst>
+          </p:cNvPr>
+          <p:cNvSpPr>
+            <a:spLocks noGrp="1"/>
+          </p:cNvSpPr>
+          <p:nvPr>
+            <p:ph type="sldNum" sz="quarter" idx="12"/>
+          </p:nvPr>
+        </p:nvSpPr>
+        <p:spPr/>
+        <p:txBody>
+          <a:bodyPr/>
+          <a:lstStyle/>
+          <a:p>
+            <a:fld id="{27C6CCC6-2BE5-4E42-96A4-D1E8E81A3D8E}" type="slidenum">
+              <a:rPr lang="fr-FR" smtClean="0"/>
+              <a:t>14</a:t>
             </a:fld>
             <a:endParaRPr lang="fr-FR"/>
           </a:p>
@@ -10433,7 +10885,7 @@
 </p:sld>
 </file>
 
-<file path=ppt/slides/slide14.xml><?xml version="1.0" encoding="utf-8"?>
+<file path=ppt/slides/slide15.xml><?xml version="1.0" encoding="utf-8"?>
 <p:sld xmlns:a="http://schemas.openxmlformats.org/drawingml/2006/main" xmlns:r="http://schemas.openxmlformats.org/officeDocument/2006/relationships" xmlns:p="http://schemas.openxmlformats.org/presentationml/2006/main">
   <p:cSld>
     <p:spTree>
@@ -11451,7 +11903,7 @@
           <a:p>
             <a:fld id="{27C6CCC6-2BE5-4E42-96A4-D1E8E81A3D8E}" type="slidenum">
               <a:rPr lang="fr-FR" smtClean="0"/>
-              <a:t>14</a:t>
+              <a:t>15</a:t>
             </a:fld>
             <a:endParaRPr lang="fr-FR"/>
           </a:p>
@@ -11470,7 +11922,7 @@
 </p:sld>
 </file>
 
-<file path=ppt/slides/slide15.xml><?xml version="1.0" encoding="utf-8"?>
+<file path=ppt/slides/slide16.xml><?xml version="1.0" encoding="utf-8"?>
 <p:sld xmlns:a="http://schemas.openxmlformats.org/drawingml/2006/main" xmlns:r="http://schemas.openxmlformats.org/officeDocument/2006/relationships" xmlns:p="http://schemas.openxmlformats.org/presentationml/2006/main">
   <p:cSld>
     <p:spTree>
@@ -12409,8 +12861,8 @@
           </a:p>
         </p:txBody>
       </p:sp>
-      <mc:AlternateContent xmlns:mc="http://schemas.openxmlformats.org/markup-compatibility/2006">
-        <mc:Choice xmlns:a14="http://schemas.microsoft.com/office/drawing/2010/main" Requires="a14">
+      <mc:AlternateContent xmlns:mc="http://schemas.openxmlformats.org/markup-compatibility/2006" xmlns:a14="http://schemas.microsoft.com/office/drawing/2010/main">
+        <mc:Choice Requires="a14">
           <p:sp>
             <p:nvSpPr>
               <p:cNvPr id="25" name="TextBox 24">
@@ -12948,7 +13400,7 @@
             </p:txBody>
           </p:sp>
         </mc:Choice>
-        <mc:Fallback>
+        <mc:Fallback xmlns="">
           <p:sp>
             <p:nvSpPr>
               <p:cNvPr id="25" name="TextBox 24">
@@ -13193,7 +13645,7 @@
           <a:p>
             <a:fld id="{27C6CCC6-2BE5-4E42-96A4-D1E8E81A3D8E}" type="slidenum">
               <a:rPr lang="fr-FR" smtClean="0"/>
-              <a:t>15</a:t>
+              <a:t>16</a:t>
             </a:fld>
             <a:endParaRPr lang="fr-FR"/>
           </a:p>
@@ -13212,7 +13664,7 @@
 </p:sld>
 </file>
 
-<file path=ppt/slides/slide16.xml><?xml version="1.0" encoding="utf-8"?>
+<file path=ppt/slides/slide17.xml><?xml version="1.0" encoding="utf-8"?>
 <p:sld xmlns:a="http://schemas.openxmlformats.org/drawingml/2006/main" xmlns:r="http://schemas.openxmlformats.org/officeDocument/2006/relationships" xmlns:p="http://schemas.openxmlformats.org/presentationml/2006/main">
   <p:cSld>
     <p:spTree>
@@ -16634,7 +17086,7 @@
           <a:p>
             <a:fld id="{27C6CCC6-2BE5-4E42-96A4-D1E8E81A3D8E}" type="slidenum">
               <a:rPr lang="fr-FR" smtClean="0"/>
-              <a:t>16</a:t>
+              <a:t>17</a:t>
             </a:fld>
             <a:endParaRPr lang="fr-FR"/>
           </a:p>
@@ -16763,7 +17215,7 @@
 </p:sld>
 </file>
 
-<file path=ppt/slides/slide17.xml><?xml version="1.0" encoding="utf-8"?>
+<file path=ppt/slides/slide18.xml><?xml version="1.0" encoding="utf-8"?>
 <p:sld xmlns:a="http://schemas.openxmlformats.org/drawingml/2006/main" xmlns:r="http://schemas.openxmlformats.org/officeDocument/2006/relationships" xmlns:p="http://schemas.openxmlformats.org/presentationml/2006/main">
   <p:cSld>
     <p:spTree>
@@ -16975,7 +17427,7 @@
           <a:p>
             <a:fld id="{27C6CCC6-2BE5-4E42-96A4-D1E8E81A3D8E}" type="slidenum">
               <a:rPr lang="fr-FR" smtClean="0"/>
-              <a:t>17</a:t>
+              <a:t>18</a:t>
             </a:fld>
             <a:endParaRPr lang="fr-FR"/>
           </a:p>
@@ -17175,7 +17627,7 @@
 </p:sld>
 </file>
 
-<file path=ppt/slides/slide18.xml><?xml version="1.0" encoding="utf-8"?>
+<file path=ppt/slides/slide19.xml><?xml version="1.0" encoding="utf-8"?>
 <p:sld xmlns:a="http://schemas.openxmlformats.org/drawingml/2006/main" xmlns:r="http://schemas.openxmlformats.org/officeDocument/2006/relationships" xmlns:p="http://schemas.openxmlformats.org/presentationml/2006/main">
   <p:cSld>
     <p:spTree>
@@ -17666,7 +18118,7 @@
           <a:p>
             <a:fld id="{27C6CCC6-2BE5-4E42-96A4-D1E8E81A3D8E}" type="slidenum">
               <a:rPr lang="fr-FR" smtClean="0"/>
-              <a:t>18</a:t>
+              <a:t>19</a:t>
             </a:fld>
             <a:endParaRPr lang="fr-FR"/>
           </a:p>
@@ -18151,7 +18603,1142 @@
 </p:sld>
 </file>
 
-<file path=ppt/slides/slide19.xml><?xml version="1.0" encoding="utf-8"?>
+<file path=ppt/slides/slide2.xml><?xml version="1.0" encoding="utf-8"?>
+<p:sld xmlns:a="http://schemas.openxmlformats.org/drawingml/2006/main" xmlns:r="http://schemas.openxmlformats.org/officeDocument/2006/relationships" xmlns:p="http://schemas.openxmlformats.org/presentationml/2006/main">
+  <p:cSld>
+    <p:bg>
+      <p:bgPr>
+        <a:solidFill>
+          <a:schemeClr val="bg1"/>
+        </a:solidFill>
+        <a:effectLst/>
+      </p:bgPr>
+    </p:bg>
+    <p:spTree>
+      <p:nvGrpSpPr>
+        <p:cNvPr id="1" name=""/>
+        <p:cNvGrpSpPr/>
+        <p:nvPr/>
+      </p:nvGrpSpPr>
+      <p:grpSpPr>
+        <a:xfrm>
+          <a:off x="0" y="0"/>
+          <a:ext cx="0" cy="0"/>
+          <a:chOff x="0" y="0"/>
+          <a:chExt cx="0" cy="0"/>
+        </a:xfrm>
+      </p:grpSpPr>
+      <p:sp useBgFill="1">
+        <p:nvSpPr>
+          <p:cNvPr id="9" name="Rectangle 8">
+            <a:extLst>
+              <a:ext uri="{FF2B5EF4-FFF2-40B4-BE49-F238E27FC236}">
+                <a16:creationId xmlns:a16="http://schemas.microsoft.com/office/drawing/2014/main" id="{560AFAAC-EA6C-45A9-9E03-C9C9F0193B4F}"/>
+              </a:ext>
+              <a:ext uri="{C183D7F6-B498-43B3-948B-1728B52AA6E4}">
+                <adec:decorative xmlns:adec="http://schemas.microsoft.com/office/drawing/2017/decorative" val="1"/>
+              </a:ext>
+            </a:extLst>
+          </p:cNvPr>
+          <p:cNvSpPr>
+            <a:spLocks noGrp="1" noRot="1" noChangeAspect="1" noMove="1" noResize="1" noEditPoints="1" noAdjustHandles="1" noChangeArrowheads="1" noChangeShapeType="1" noTextEdit="1"/>
+          </p:cNvSpPr>
+          <p:nvPr>
+            <p:extLst>
+              <p:ext uri="{386F3935-93C4-4BCD-93E2-E3B085C9AB24}">
+                <p16:designElem xmlns:p16="http://schemas.microsoft.com/office/powerpoint/2015/main" val="1"/>
+              </p:ext>
+            </p:extLst>
+          </p:nvPr>
+        </p:nvSpPr>
+        <p:spPr>
+          <a:xfrm>
+            <a:off x="0" y="0"/>
+            <a:ext cx="12192000" cy="6858000"/>
+          </a:xfrm>
+          <a:prstGeom prst="rect">
+            <a:avLst/>
+          </a:prstGeom>
+          <a:ln>
+            <a:noFill/>
+          </a:ln>
+        </p:spPr>
+        <p:style>
+          <a:lnRef idx="2">
+            <a:schemeClr val="accent1">
+              <a:shade val="50000"/>
+            </a:schemeClr>
+          </a:lnRef>
+          <a:fillRef idx="1">
+            <a:schemeClr val="accent1"/>
+          </a:fillRef>
+          <a:effectRef idx="0">
+            <a:schemeClr val="accent1"/>
+          </a:effectRef>
+          <a:fontRef idx="minor">
+            <a:schemeClr val="lt1"/>
+          </a:fontRef>
+        </p:style>
+        <p:txBody>
+          <a:bodyPr rtlCol="0" anchor="ctr"/>
+          <a:lstStyle/>
+          <a:p>
+            <a:pPr algn="ctr"/>
+            <a:endParaRPr lang="en-US"/>
+          </a:p>
+        </p:txBody>
+      </p:sp>
+      <p:pic>
+        <p:nvPicPr>
+          <p:cNvPr id="5" name="Image 4" descr="Une image contenant plein air, agriculture, récolte, Culture commerciale&#10;&#10;Description générée automatiquement">
+            <a:extLst>
+              <a:ext uri="{FF2B5EF4-FFF2-40B4-BE49-F238E27FC236}">
+                <a16:creationId xmlns:a16="http://schemas.microsoft.com/office/drawing/2014/main" id="{3786E0D1-E499-E045-7B99-26DBAEB36AB5}"/>
+              </a:ext>
+            </a:extLst>
+          </p:cNvPr>
+          <p:cNvPicPr>
+            <a:picLocks noChangeAspect="1"/>
+          </p:cNvPicPr>
+          <p:nvPr/>
+        </p:nvPicPr>
+        <p:blipFill rotWithShape="1">
+          <a:blip r:embed="rId3"/>
+          <a:srcRect t="34" r="10050" b="-34"/>
+          <a:stretch/>
+        </p:blipFill>
+        <p:spPr>
+          <a:xfrm>
+            <a:off x="3009075" y="0"/>
+            <a:ext cx="9184645" cy="6861124"/>
+          </a:xfrm>
+          <a:prstGeom prst="rect">
+            <a:avLst/>
+          </a:prstGeom>
+        </p:spPr>
+      </p:pic>
+      <p:sp useBgFill="1">
+        <p:nvSpPr>
+          <p:cNvPr id="11" name="Freeform: Shape 10">
+            <a:extLst>
+              <a:ext uri="{FF2B5EF4-FFF2-40B4-BE49-F238E27FC236}">
+                <a16:creationId xmlns:a16="http://schemas.microsoft.com/office/drawing/2014/main" id="{83549E37-C86B-4401-90BD-D8BF83859F14}"/>
+              </a:ext>
+              <a:ext uri="{C183D7F6-B498-43B3-948B-1728B52AA6E4}">
+                <adec:decorative xmlns:adec="http://schemas.microsoft.com/office/drawing/2017/decorative" val="1"/>
+              </a:ext>
+            </a:extLst>
+          </p:cNvPr>
+          <p:cNvSpPr>
+            <a:spLocks noGrp="1" noRot="1" noChangeAspect="1" noMove="1" noResize="1" noEditPoints="1" noAdjustHandles="1" noChangeArrowheads="1" noChangeShapeType="1" noTextEdit="1"/>
+          </p:cNvSpPr>
+          <p:nvPr>
+            <p:extLst>
+              <p:ext uri="{386F3935-93C4-4BCD-93E2-E3B085C9AB24}">
+                <p16:designElem xmlns:p16="http://schemas.microsoft.com/office/powerpoint/2015/main" val="1"/>
+              </p:ext>
+            </p:extLst>
+          </p:nvPr>
+        </p:nvSpPr>
+        <p:spPr>
+          <a:xfrm>
+            <a:off x="0" y="0"/>
+            <a:ext cx="6096001" cy="6858000"/>
+          </a:xfrm>
+          <a:custGeom>
+            <a:avLst/>
+            <a:gdLst>
+              <a:gd name="connsiteX0" fmla="*/ 0 w 6096001"/>
+              <a:gd name="connsiteY0" fmla="*/ 0 h 6858000"/>
+              <a:gd name="connsiteX1" fmla="*/ 4883023 w 6096001"/>
+              <a:gd name="connsiteY1" fmla="*/ 0 h 6858000"/>
+              <a:gd name="connsiteX2" fmla="*/ 4946006 w 6096001"/>
+              <a:gd name="connsiteY2" fmla="*/ 69271 h 6858000"/>
+              <a:gd name="connsiteX3" fmla="*/ 6096001 w 6096001"/>
+              <a:gd name="connsiteY3" fmla="*/ 3429000 h 6858000"/>
+              <a:gd name="connsiteX4" fmla="*/ 4946006 w 6096001"/>
+              <a:gd name="connsiteY4" fmla="*/ 6788730 h 6858000"/>
+              <a:gd name="connsiteX5" fmla="*/ 4883023 w 6096001"/>
+              <a:gd name="connsiteY5" fmla="*/ 6858000 h 6858000"/>
+              <a:gd name="connsiteX6" fmla="*/ 0 w 6096001"/>
+              <a:gd name="connsiteY6" fmla="*/ 6858000 h 6858000"/>
+            </a:gdLst>
+            <a:ahLst/>
+            <a:cxnLst>
+              <a:cxn ang="0">
+                <a:pos x="connsiteX0" y="connsiteY0"/>
+              </a:cxn>
+              <a:cxn ang="0">
+                <a:pos x="connsiteX1" y="connsiteY1"/>
+              </a:cxn>
+              <a:cxn ang="0">
+                <a:pos x="connsiteX2" y="connsiteY2"/>
+              </a:cxn>
+              <a:cxn ang="0">
+                <a:pos x="connsiteX3" y="connsiteY3"/>
+              </a:cxn>
+              <a:cxn ang="0">
+                <a:pos x="connsiteX4" y="connsiteY4"/>
+              </a:cxn>
+              <a:cxn ang="0">
+                <a:pos x="connsiteX5" y="connsiteY5"/>
+              </a:cxn>
+              <a:cxn ang="0">
+                <a:pos x="connsiteX6" y="connsiteY6"/>
+              </a:cxn>
+            </a:cxnLst>
+            <a:rect l="l" t="t" r="r" b="b"/>
+            <a:pathLst>
+              <a:path w="6096001" h="6858000">
+                <a:moveTo>
+                  <a:pt x="0" y="0"/>
+                </a:moveTo>
+                <a:lnTo>
+                  <a:pt x="4883023" y="0"/>
+                </a:lnTo>
+                <a:lnTo>
+                  <a:pt x="4946006" y="69271"/>
+                </a:lnTo>
+                <a:cubicBezTo>
+                  <a:pt x="5656532" y="929100"/>
+                  <a:pt x="6096001" y="2116944"/>
+                  <a:pt x="6096001" y="3429000"/>
+                </a:cubicBezTo>
+                <a:cubicBezTo>
+                  <a:pt x="6096001" y="4741056"/>
+                  <a:pt x="5656532" y="5928900"/>
+                  <a:pt x="4946006" y="6788730"/>
+                </a:cubicBezTo>
+                <a:lnTo>
+                  <a:pt x="4883023" y="6858000"/>
+                </a:lnTo>
+                <a:lnTo>
+                  <a:pt x="0" y="6858000"/>
+                </a:lnTo>
+                <a:close/>
+              </a:path>
+            </a:pathLst>
+          </a:custGeom>
+          <a:ln w="9525">
+            <a:solidFill>
+              <a:srgbClr val="EFEFEF"/>
+            </a:solidFill>
+          </a:ln>
+          <a:effectLst>
+            <a:outerShdw blurRad="50800" dist="38100" algn="l" rotWithShape="0">
+              <a:schemeClr val="bg1">
+                <a:lumMod val="85000"/>
+                <a:alpha val="30000"/>
+              </a:schemeClr>
+            </a:outerShdw>
+          </a:effectLst>
+        </p:spPr>
+        <p:style>
+          <a:lnRef idx="2">
+            <a:schemeClr val="accent1">
+              <a:shade val="50000"/>
+            </a:schemeClr>
+          </a:lnRef>
+          <a:fillRef idx="1">
+            <a:schemeClr val="accent1"/>
+          </a:fillRef>
+          <a:effectRef idx="0">
+            <a:schemeClr val="accent1"/>
+          </a:effectRef>
+          <a:fontRef idx="minor">
+            <a:schemeClr val="lt1"/>
+          </a:fontRef>
+        </p:style>
+        <p:txBody>
+          <a:bodyPr wrap="square" rtlCol="0" anchor="ctr">
+            <a:noAutofit/>
+          </a:bodyPr>
+          <a:lstStyle/>
+          <a:p>
+            <a:pPr marL="0" marR="0" lvl="0" indent="0" algn="ctr" defTabSz="914400" rtl="0" eaLnBrk="1" fontAlgn="auto" latinLnBrk="0" hangingPunct="1">
+              <a:lnSpc>
+                <a:spcPct val="100000"/>
+              </a:lnSpc>
+              <a:spcBef>
+                <a:spcPts val="0"/>
+              </a:spcBef>
+              <a:spcAft>
+                <a:spcPts val="0"/>
+              </a:spcAft>
+              <a:buClrTx/>
+              <a:buSzTx/>
+              <a:buFontTx/>
+              <a:buNone/>
+              <a:tabLst/>
+              <a:defRPr/>
+            </a:pPr>
+            <a:endParaRPr kumimoji="0" lang="en-US" sz="1800" b="0" i="0" u="none" strike="noStrike" kern="1200" cap="none" spc="0" normalizeH="0" baseline="0" noProof="0">
+              <a:ln>
+                <a:noFill/>
+              </a:ln>
+              <a:solidFill>
+                <a:prstClr val="white"/>
+              </a:solidFill>
+              <a:effectLst/>
+              <a:uLnTx/>
+              <a:uFillTx/>
+              <a:latin typeface="Calibri" panose="020F0502020204030204"/>
+              <a:ea typeface="+mn-ea"/>
+              <a:cs typeface="+mn-cs"/>
+            </a:endParaRPr>
+          </a:p>
+        </p:txBody>
+      </p:sp>
+      <p:sp useBgFill="1">
+        <p:nvSpPr>
+          <p:cNvPr id="13" name="Freeform: Shape 12">
+            <a:extLst>
+              <a:ext uri="{FF2B5EF4-FFF2-40B4-BE49-F238E27FC236}">
+                <a16:creationId xmlns:a16="http://schemas.microsoft.com/office/drawing/2014/main" id="{8A17784E-76D8-4521-A77D-0D2EBB923004}"/>
+              </a:ext>
+              <a:ext uri="{C183D7F6-B498-43B3-948B-1728B52AA6E4}">
+                <adec:decorative xmlns:adec="http://schemas.microsoft.com/office/drawing/2017/decorative" val="1"/>
+              </a:ext>
+            </a:extLst>
+          </p:cNvPr>
+          <p:cNvSpPr>
+            <a:spLocks noGrp="1" noRot="1" noChangeAspect="1" noMove="1" noResize="1" noEditPoints="1" noAdjustHandles="1" noChangeArrowheads="1" noChangeShapeType="1" noTextEdit="1"/>
+          </p:cNvSpPr>
+          <p:nvPr>
+            <p:extLst>
+              <p:ext uri="{386F3935-93C4-4BCD-93E2-E3B085C9AB24}">
+                <p16:designElem xmlns:p16="http://schemas.microsoft.com/office/powerpoint/2015/main" val="1"/>
+              </p:ext>
+            </p:extLst>
+          </p:nvPr>
+        </p:nvSpPr>
+        <p:spPr>
+          <a:xfrm>
+            <a:off x="0" y="0"/>
+            <a:ext cx="6086857" cy="6858000"/>
+          </a:xfrm>
+          <a:custGeom>
+            <a:avLst/>
+            <a:gdLst>
+              <a:gd name="connsiteX0" fmla="*/ 0 w 6086857"/>
+              <a:gd name="connsiteY0" fmla="*/ 0 h 6858000"/>
+              <a:gd name="connsiteX1" fmla="*/ 4873879 w 6086857"/>
+              <a:gd name="connsiteY1" fmla="*/ 0 h 6858000"/>
+              <a:gd name="connsiteX2" fmla="*/ 4936862 w 6086857"/>
+              <a:gd name="connsiteY2" fmla="*/ 69271 h 6858000"/>
+              <a:gd name="connsiteX3" fmla="*/ 6086857 w 6086857"/>
+              <a:gd name="connsiteY3" fmla="*/ 3429000 h 6858000"/>
+              <a:gd name="connsiteX4" fmla="*/ 4936862 w 6086857"/>
+              <a:gd name="connsiteY4" fmla="*/ 6788730 h 6858000"/>
+              <a:gd name="connsiteX5" fmla="*/ 4873879 w 6086857"/>
+              <a:gd name="connsiteY5" fmla="*/ 6858000 h 6858000"/>
+              <a:gd name="connsiteX6" fmla="*/ 0 w 6086857"/>
+              <a:gd name="connsiteY6" fmla="*/ 6858000 h 6858000"/>
+            </a:gdLst>
+            <a:ahLst/>
+            <a:cxnLst>
+              <a:cxn ang="0">
+                <a:pos x="connsiteX0" y="connsiteY0"/>
+              </a:cxn>
+              <a:cxn ang="0">
+                <a:pos x="connsiteX1" y="connsiteY1"/>
+              </a:cxn>
+              <a:cxn ang="0">
+                <a:pos x="connsiteX2" y="connsiteY2"/>
+              </a:cxn>
+              <a:cxn ang="0">
+                <a:pos x="connsiteX3" y="connsiteY3"/>
+              </a:cxn>
+              <a:cxn ang="0">
+                <a:pos x="connsiteX4" y="connsiteY4"/>
+              </a:cxn>
+              <a:cxn ang="0">
+                <a:pos x="connsiteX5" y="connsiteY5"/>
+              </a:cxn>
+              <a:cxn ang="0">
+                <a:pos x="connsiteX6" y="connsiteY6"/>
+              </a:cxn>
+            </a:cxnLst>
+            <a:rect l="l" t="t" r="r" b="b"/>
+            <a:pathLst>
+              <a:path w="6086857" h="6858000">
+                <a:moveTo>
+                  <a:pt x="0" y="0"/>
+                </a:moveTo>
+                <a:lnTo>
+                  <a:pt x="4873879" y="0"/>
+                </a:lnTo>
+                <a:lnTo>
+                  <a:pt x="4936862" y="69271"/>
+                </a:lnTo>
+                <a:cubicBezTo>
+                  <a:pt x="5647388" y="929100"/>
+                  <a:pt x="6086857" y="2116944"/>
+                  <a:pt x="6086857" y="3429000"/>
+                </a:cubicBezTo>
+                <a:cubicBezTo>
+                  <a:pt x="6086857" y="4741056"/>
+                  <a:pt x="5647388" y="5928900"/>
+                  <a:pt x="4936862" y="6788730"/>
+                </a:cubicBezTo>
+                <a:lnTo>
+                  <a:pt x="4873879" y="6858000"/>
+                </a:lnTo>
+                <a:lnTo>
+                  <a:pt x="0" y="6858000"/>
+                </a:lnTo>
+                <a:close/>
+              </a:path>
+            </a:pathLst>
+          </a:custGeom>
+          <a:ln w="9525">
+            <a:noFill/>
+          </a:ln>
+          <a:effectLst/>
+        </p:spPr>
+        <p:style>
+          <a:lnRef idx="2">
+            <a:schemeClr val="accent1">
+              <a:shade val="50000"/>
+            </a:schemeClr>
+          </a:lnRef>
+          <a:fillRef idx="1">
+            <a:schemeClr val="accent1"/>
+          </a:fillRef>
+          <a:effectRef idx="0">
+            <a:schemeClr val="accent1"/>
+          </a:effectRef>
+          <a:fontRef idx="minor">
+            <a:schemeClr val="lt1"/>
+          </a:fontRef>
+        </p:style>
+        <p:txBody>
+          <a:bodyPr wrap="square" rtlCol="0" anchor="ctr">
+            <a:noAutofit/>
+          </a:bodyPr>
+          <a:lstStyle/>
+          <a:p>
+            <a:pPr marL="0" marR="0" lvl="0" indent="0" algn="ctr" defTabSz="914400" rtl="0" eaLnBrk="1" fontAlgn="auto" latinLnBrk="0" hangingPunct="1">
+              <a:lnSpc>
+                <a:spcPct val="100000"/>
+              </a:lnSpc>
+              <a:spcBef>
+                <a:spcPts val="0"/>
+              </a:spcBef>
+              <a:spcAft>
+                <a:spcPts val="0"/>
+              </a:spcAft>
+              <a:buClrTx/>
+              <a:buSzTx/>
+              <a:buFontTx/>
+              <a:buNone/>
+              <a:tabLst/>
+              <a:defRPr/>
+            </a:pPr>
+            <a:endParaRPr kumimoji="0" lang="en-US" sz="1800" b="0" i="0" u="none" strike="noStrike" kern="1200" cap="none" spc="0" normalizeH="0" baseline="0" noProof="0">
+              <a:ln>
+                <a:noFill/>
+              </a:ln>
+              <a:solidFill>
+                <a:prstClr val="white"/>
+              </a:solidFill>
+              <a:effectLst/>
+              <a:uLnTx/>
+              <a:uFillTx/>
+              <a:latin typeface="Calibri" panose="020F0502020204030204"/>
+              <a:ea typeface="+mn-ea"/>
+              <a:cs typeface="+mn-cs"/>
+            </a:endParaRPr>
+          </a:p>
+        </p:txBody>
+      </p:sp>
+      <p:sp>
+        <p:nvSpPr>
+          <p:cNvPr id="2" name="Titre 1">
+            <a:extLst>
+              <a:ext uri="{FF2B5EF4-FFF2-40B4-BE49-F238E27FC236}">
+                <a16:creationId xmlns:a16="http://schemas.microsoft.com/office/drawing/2014/main" id="{7DDB3797-4CC7-EDEE-FE39-54180F07BBDD}"/>
+              </a:ext>
+            </a:extLst>
+          </p:cNvPr>
+          <p:cNvSpPr>
+            <a:spLocks noGrp="1"/>
+          </p:cNvSpPr>
+          <p:nvPr>
+            <p:ph type="title"/>
+          </p:nvPr>
+        </p:nvSpPr>
+        <p:spPr>
+          <a:xfrm>
+            <a:off x="374904" y="272618"/>
+            <a:ext cx="4992624" cy="1243584"/>
+          </a:xfrm>
+        </p:spPr>
+        <p:txBody>
+          <a:bodyPr anchor="ctr">
+            <a:normAutofit/>
+          </a:bodyPr>
+          <a:lstStyle/>
+          <a:p>
+            <a:r>
+              <a:rPr lang="fr-FR" sz="4000" dirty="0" err="1"/>
+              <a:t>Intercropping</a:t>
+            </a:r>
+            <a:endParaRPr lang="fr-FR" sz="4000" dirty="0"/>
+          </a:p>
+        </p:txBody>
+      </p:sp>
+      <p:sp>
+        <p:nvSpPr>
+          <p:cNvPr id="3" name="Espace réservé du contenu 2">
+            <a:extLst>
+              <a:ext uri="{FF2B5EF4-FFF2-40B4-BE49-F238E27FC236}">
+                <a16:creationId xmlns:a16="http://schemas.microsoft.com/office/drawing/2014/main" id="{2F576957-2006-8C6B-72B0-A66981D2DBA4}"/>
+              </a:ext>
+            </a:extLst>
+          </p:cNvPr>
+          <p:cNvSpPr>
+            <a:spLocks noGrp="1"/>
+          </p:cNvSpPr>
+          <p:nvPr>
+            <p:ph idx="1"/>
+          </p:nvPr>
+        </p:nvSpPr>
+        <p:spPr>
+          <a:xfrm>
+            <a:off x="373184" y="1423788"/>
+            <a:ext cx="4875997" cy="1361942"/>
+          </a:xfrm>
+        </p:spPr>
+        <p:txBody>
+          <a:bodyPr vert="horz" lIns="91440" tIns="45720" rIns="91440" bIns="45720" rtlCol="0" anchor="t">
+            <a:normAutofit/>
+          </a:bodyPr>
+          <a:lstStyle/>
+          <a:p>
+            <a:pPr marL="0" indent="0">
+              <a:buNone/>
+            </a:pPr>
+            <a:r>
+              <a:rPr lang="fr-FR" sz="2000" dirty="0"/>
+              <a:t>= </a:t>
+            </a:r>
+            <a:r>
+              <a:rPr lang="fr-FR" sz="2000" dirty="0" err="1"/>
+              <a:t>agroecological</a:t>
+            </a:r>
+            <a:r>
+              <a:rPr lang="fr-FR" sz="2000" dirty="0"/>
+              <a:t> </a:t>
+            </a:r>
+            <a:r>
+              <a:rPr lang="fr-FR" sz="2000" dirty="0" err="1"/>
+              <a:t>pratice</a:t>
+            </a:r>
+            <a:r>
+              <a:rPr lang="fr-FR" sz="2000" dirty="0"/>
+              <a:t> </a:t>
+            </a:r>
+            <a:r>
+              <a:rPr lang="fr-FR" sz="2000" dirty="0" err="1"/>
+              <a:t>where</a:t>
+            </a:r>
+            <a:r>
+              <a:rPr lang="fr-FR" sz="2000" dirty="0"/>
+              <a:t> at least </a:t>
+            </a:r>
+            <a:r>
+              <a:rPr lang="fr-FR" sz="2000" dirty="0" err="1"/>
+              <a:t>two</a:t>
+            </a:r>
+            <a:r>
+              <a:rPr lang="fr-FR" sz="2000" dirty="0"/>
+              <a:t> </a:t>
+            </a:r>
+            <a:r>
+              <a:rPr lang="fr-FR" sz="2000" dirty="0" err="1"/>
+              <a:t>crop</a:t>
+            </a:r>
+            <a:r>
+              <a:rPr lang="fr-FR" sz="2000" dirty="0"/>
+              <a:t> </a:t>
+            </a:r>
+            <a:r>
+              <a:rPr lang="fr-FR" sz="2000" dirty="0" err="1"/>
+              <a:t>species</a:t>
+            </a:r>
+            <a:r>
+              <a:rPr lang="fr-FR" sz="2000" dirty="0"/>
+              <a:t> are </a:t>
+            </a:r>
+            <a:r>
+              <a:rPr lang="fr-FR" sz="2000" dirty="0" err="1"/>
+              <a:t>grown</a:t>
+            </a:r>
+            <a:r>
+              <a:rPr lang="fr-FR" sz="2000" dirty="0"/>
+              <a:t> </a:t>
+            </a:r>
+            <a:r>
+              <a:rPr lang="fr-FR" sz="2000" dirty="0" err="1"/>
+              <a:t>together</a:t>
+            </a:r>
+            <a:r>
+              <a:rPr lang="fr-FR" sz="2000" dirty="0"/>
+              <a:t> </a:t>
+            </a:r>
+          </a:p>
+          <a:p>
+            <a:pPr marL="0" indent="0">
+              <a:buNone/>
+            </a:pPr>
+            <a:r>
+              <a:rPr lang="fr-FR" sz="1200" dirty="0"/>
+              <a:t>(</a:t>
+            </a:r>
+            <a:r>
+              <a:rPr lang="fr-FR" sz="1200" dirty="0" err="1"/>
+              <a:t>Vandermeer</a:t>
+            </a:r>
+            <a:r>
+              <a:rPr lang="fr-FR" sz="1200" dirty="0"/>
+              <a:t>, 1989)</a:t>
+            </a:r>
+          </a:p>
+        </p:txBody>
+      </p:sp>
+      <p:sp>
+        <p:nvSpPr>
+          <p:cNvPr id="7" name="ZoneTexte 6">
+            <a:extLst>
+              <a:ext uri="{FF2B5EF4-FFF2-40B4-BE49-F238E27FC236}">
+                <a16:creationId xmlns:a16="http://schemas.microsoft.com/office/drawing/2014/main" id="{539C11AB-2D6F-DBBE-7F83-17817FF0989D}"/>
+              </a:ext>
+            </a:extLst>
+          </p:cNvPr>
+          <p:cNvSpPr txBox="1"/>
+          <p:nvPr/>
+        </p:nvSpPr>
+        <p:spPr>
+          <a:xfrm>
+            <a:off x="8763171" y="4131689"/>
+            <a:ext cx="1473905" cy="646331"/>
+          </a:xfrm>
+          <a:prstGeom prst="rect">
+            <a:avLst/>
+          </a:prstGeom>
+          <a:solidFill>
+            <a:srgbClr val="AEAEAE">
+              <a:alpha val="74902"/>
+            </a:srgbClr>
+          </a:solidFill>
+        </p:spPr>
+        <p:txBody>
+          <a:bodyPr rot="0" spcFirstLastPara="0" vertOverflow="overflow" horzOverflow="overflow" vert="horz" wrap="square" lIns="91440" tIns="45720" rIns="91440" bIns="45720" numCol="1" spcCol="0" rtlCol="0" fromWordArt="0" anchor="t" anchorCtr="0" forceAA="0" compatLnSpc="1">
+            <a:prstTxWarp prst="textNoShape">
+              <a:avLst/>
+            </a:prstTxWarp>
+            <a:spAutoFit/>
+          </a:bodyPr>
+          <a:lstStyle/>
+          <a:p>
+            <a:pPr algn="l"/>
+            <a:r>
+              <a:rPr lang="fr-FR" b="1" dirty="0"/>
+              <a:t>CEREALS</a:t>
+            </a:r>
+          </a:p>
+          <a:p>
+            <a:r>
+              <a:rPr lang="fr-FR" dirty="0"/>
+              <a:t>e.g.: </a:t>
+            </a:r>
+            <a:r>
+              <a:rPr lang="fr-FR" dirty="0" err="1"/>
+              <a:t>sorghum</a:t>
+            </a:r>
+            <a:endParaRPr lang="fr-FR" dirty="0"/>
+          </a:p>
+        </p:txBody>
+      </p:sp>
+      <p:sp>
+        <p:nvSpPr>
+          <p:cNvPr id="8" name="ZoneTexte 7">
+            <a:extLst>
+              <a:ext uri="{FF2B5EF4-FFF2-40B4-BE49-F238E27FC236}">
+                <a16:creationId xmlns:a16="http://schemas.microsoft.com/office/drawing/2014/main" id="{E217DA51-B5A8-AFAB-D602-DF8A424A8898}"/>
+              </a:ext>
+            </a:extLst>
+          </p:cNvPr>
+          <p:cNvSpPr txBox="1"/>
+          <p:nvPr/>
+        </p:nvSpPr>
+        <p:spPr>
+          <a:xfrm>
+            <a:off x="6716995" y="4131689"/>
+            <a:ext cx="1378792" cy="646331"/>
+          </a:xfrm>
+          <a:prstGeom prst="rect">
+            <a:avLst/>
+          </a:prstGeom>
+          <a:solidFill>
+            <a:srgbClr val="AEAEAE">
+              <a:alpha val="74902"/>
+            </a:srgbClr>
+          </a:solidFill>
+        </p:spPr>
+        <p:txBody>
+          <a:bodyPr rot="0" spcFirstLastPara="0" vertOverflow="overflow" horzOverflow="overflow" vert="horz" wrap="square" lIns="91440" tIns="45720" rIns="91440" bIns="45720" numCol="1" spcCol="0" rtlCol="0" fromWordArt="0" anchor="t" anchorCtr="0" forceAA="0" compatLnSpc="1">
+            <a:prstTxWarp prst="textNoShape">
+              <a:avLst/>
+            </a:prstTxWarp>
+            <a:spAutoFit/>
+          </a:bodyPr>
+          <a:lstStyle/>
+          <a:p>
+            <a:pPr algn="l"/>
+            <a:r>
+              <a:rPr lang="fr-FR" b="1" dirty="0"/>
+              <a:t>LEGUMES</a:t>
+            </a:r>
+          </a:p>
+          <a:p>
+            <a:r>
+              <a:rPr lang="fr-FR" dirty="0"/>
+              <a:t>e.g.: </a:t>
+            </a:r>
+            <a:r>
+              <a:rPr lang="fr-FR" dirty="0" err="1"/>
+              <a:t>cowpea</a:t>
+            </a:r>
+            <a:endParaRPr lang="fr-FR" dirty="0"/>
+          </a:p>
+        </p:txBody>
+      </p:sp>
+      <p:sp>
+        <p:nvSpPr>
+          <p:cNvPr id="4" name="Slide Number Placeholder 3">
+            <a:extLst>
+              <a:ext uri="{FF2B5EF4-FFF2-40B4-BE49-F238E27FC236}">
+                <a16:creationId xmlns:a16="http://schemas.microsoft.com/office/drawing/2014/main" id="{BE6FE07A-B7DD-4BCA-A02A-FB967C727457}"/>
+              </a:ext>
+            </a:extLst>
+          </p:cNvPr>
+          <p:cNvSpPr>
+            <a:spLocks noGrp="1"/>
+          </p:cNvSpPr>
+          <p:nvPr>
+            <p:ph type="sldNum" sz="quarter" idx="12"/>
+          </p:nvPr>
+        </p:nvSpPr>
+        <p:spPr/>
+        <p:txBody>
+          <a:bodyPr/>
+          <a:lstStyle/>
+          <a:p>
+            <a:fld id="{27C6CCC6-2BE5-4E42-96A4-D1E8E81A3D8E}" type="slidenum">
+              <a:rPr lang="fr-FR" smtClean="0"/>
+              <a:t>2</a:t>
+            </a:fld>
+            <a:endParaRPr lang="fr-FR"/>
+          </a:p>
+        </p:txBody>
+      </p:sp>
+      <p:sp>
+        <p:nvSpPr>
+          <p:cNvPr id="6" name="TextBox 5">
+            <a:extLst>
+              <a:ext uri="{FF2B5EF4-FFF2-40B4-BE49-F238E27FC236}">
+                <a16:creationId xmlns:a16="http://schemas.microsoft.com/office/drawing/2014/main" id="{B0131E4D-4574-4E1F-B022-5D79D8358D6D}"/>
+              </a:ext>
+            </a:extLst>
+          </p:cNvPr>
+          <p:cNvSpPr txBox="1"/>
+          <p:nvPr/>
+        </p:nvSpPr>
+        <p:spPr>
+          <a:xfrm>
+            <a:off x="374904" y="5495065"/>
+            <a:ext cx="4599161" cy="646331"/>
+          </a:xfrm>
+          <a:prstGeom prst="rect">
+            <a:avLst/>
+          </a:prstGeom>
+          <a:noFill/>
+        </p:spPr>
+        <p:txBody>
+          <a:bodyPr wrap="square" rtlCol="0">
+            <a:spAutoFit/>
+          </a:bodyPr>
+          <a:lstStyle/>
+          <a:p>
+            <a:pPr lvl="0">
+              <a:lnSpc>
+                <a:spcPct val="90000"/>
+              </a:lnSpc>
+              <a:spcBef>
+                <a:spcPts val="1000"/>
+              </a:spcBef>
+            </a:pPr>
+            <a:r>
+              <a:rPr lang="fr-FR" sz="2000" dirty="0">
+                <a:solidFill>
+                  <a:prstClr val="black"/>
+                </a:solidFill>
+              </a:rPr>
+              <a:t>… </a:t>
+            </a:r>
+            <a:r>
+              <a:rPr lang="fr-FR" sz="2000" dirty="0" err="1">
+                <a:solidFill>
+                  <a:prstClr val="black"/>
+                </a:solidFill>
+              </a:rPr>
+              <a:t>only</a:t>
+            </a:r>
+            <a:r>
+              <a:rPr lang="fr-FR" sz="2000" dirty="0">
+                <a:solidFill>
+                  <a:prstClr val="black"/>
+                </a:solidFill>
+              </a:rPr>
+              <a:t> if </a:t>
+            </a:r>
+            <a:r>
+              <a:rPr lang="fr-FR" sz="2000" dirty="0" err="1">
+                <a:solidFill>
+                  <a:prstClr val="black"/>
+                </a:solidFill>
+              </a:rPr>
+              <a:t>intercropping</a:t>
+            </a:r>
+            <a:r>
+              <a:rPr lang="fr-FR" sz="2000" dirty="0">
+                <a:solidFill>
+                  <a:prstClr val="black"/>
+                </a:solidFill>
+              </a:rPr>
+              <a:t> </a:t>
+            </a:r>
+            <a:r>
+              <a:rPr lang="fr-FR" sz="2000" dirty="0" err="1">
+                <a:solidFill>
+                  <a:prstClr val="black"/>
+                </a:solidFill>
+              </a:rPr>
+              <a:t>systems</a:t>
+            </a:r>
+            <a:r>
+              <a:rPr lang="fr-FR" sz="2000" dirty="0">
+                <a:solidFill>
+                  <a:prstClr val="black"/>
+                </a:solidFill>
+              </a:rPr>
+              <a:t> are </a:t>
+            </a:r>
+            <a:r>
+              <a:rPr lang="fr-FR" sz="2000" dirty="0" err="1">
+                <a:solidFill>
+                  <a:prstClr val="black"/>
+                </a:solidFill>
+              </a:rPr>
+              <a:t>optimized</a:t>
+            </a:r>
+            <a:endParaRPr lang="fr-FR" sz="2800" dirty="0">
+              <a:solidFill>
+                <a:prstClr val="black"/>
+              </a:solidFill>
+            </a:endParaRPr>
+          </a:p>
+        </p:txBody>
+      </p:sp>
+      <p:sp>
+        <p:nvSpPr>
+          <p:cNvPr id="10" name="TextBox 9">
+            <a:extLst>
+              <a:ext uri="{FF2B5EF4-FFF2-40B4-BE49-F238E27FC236}">
+                <a16:creationId xmlns:a16="http://schemas.microsoft.com/office/drawing/2014/main" id="{B1CE0F28-2DC4-4FEB-AAEF-720D45676D00}"/>
+              </a:ext>
+            </a:extLst>
+          </p:cNvPr>
+          <p:cNvSpPr txBox="1"/>
+          <p:nvPr/>
+        </p:nvSpPr>
+        <p:spPr>
+          <a:xfrm>
+            <a:off x="374903" y="3163088"/>
+            <a:ext cx="5111497" cy="1456809"/>
+          </a:xfrm>
+          <a:prstGeom prst="rect">
+            <a:avLst/>
+          </a:prstGeom>
+          <a:noFill/>
+        </p:spPr>
+        <p:txBody>
+          <a:bodyPr wrap="square" rtlCol="0">
+            <a:spAutoFit/>
+          </a:bodyPr>
+          <a:lstStyle/>
+          <a:p>
+            <a:pPr lvl="0">
+              <a:lnSpc>
+                <a:spcPct val="90000"/>
+              </a:lnSpc>
+              <a:spcBef>
+                <a:spcPts val="1000"/>
+              </a:spcBef>
+            </a:pPr>
+            <a:r>
+              <a:rPr lang="fr-FR" sz="2000" dirty="0" err="1">
+                <a:solidFill>
+                  <a:prstClr val="black"/>
+                </a:solidFill>
+              </a:rPr>
+              <a:t>Potential</a:t>
+            </a:r>
+            <a:r>
+              <a:rPr lang="fr-FR" sz="2000" dirty="0">
+                <a:solidFill>
+                  <a:prstClr val="black"/>
+                </a:solidFill>
+              </a:rPr>
+              <a:t> </a:t>
+            </a:r>
+            <a:r>
+              <a:rPr lang="fr-FR" sz="2000" dirty="0" err="1">
+                <a:solidFill>
+                  <a:prstClr val="black"/>
+                </a:solidFill>
+              </a:rPr>
+              <a:t>benefits</a:t>
+            </a:r>
+            <a:r>
+              <a:rPr lang="fr-FR" sz="2000" dirty="0">
+                <a:solidFill>
+                  <a:prstClr val="black"/>
+                </a:solidFill>
+              </a:rPr>
+              <a:t> : </a:t>
+            </a:r>
+          </a:p>
+          <a:p>
+            <a:pPr marL="742950" lvl="1" indent="-285750">
+              <a:lnSpc>
+                <a:spcPct val="90000"/>
+              </a:lnSpc>
+              <a:spcBef>
+                <a:spcPts val="500"/>
+              </a:spcBef>
+              <a:buFont typeface="Courier New,monospace" panose="020B0604020202020204" pitchFamily="34" charset="0"/>
+              <a:buChar char="o"/>
+            </a:pPr>
+            <a:r>
+              <a:rPr lang="fr-FR" sz="1600" dirty="0">
+                <a:solidFill>
+                  <a:prstClr val="black"/>
+                </a:solidFill>
+                <a:cs typeface="Arial"/>
+              </a:rPr>
+              <a:t>more </a:t>
+            </a:r>
+            <a:r>
+              <a:rPr lang="fr-FR" sz="1600" dirty="0" err="1">
+                <a:solidFill>
+                  <a:prstClr val="black"/>
+                </a:solidFill>
+                <a:cs typeface="Arial"/>
+              </a:rPr>
+              <a:t>resilience</a:t>
+            </a:r>
+            <a:r>
+              <a:rPr lang="fr-FR" sz="1600" dirty="0">
+                <a:solidFill>
+                  <a:prstClr val="black"/>
+                </a:solidFill>
+                <a:cs typeface="Arial"/>
+              </a:rPr>
+              <a:t> to stresses</a:t>
+            </a:r>
+            <a:endParaRPr lang="fr-FR" sz="1600" dirty="0">
+              <a:solidFill>
+                <a:prstClr val="black"/>
+              </a:solidFill>
+              <a:cs typeface="Arial"/>
+              <a:sym typeface="Wingdings" panose="05000000000000000000" pitchFamily="2" charset="2"/>
+            </a:endParaRPr>
+          </a:p>
+          <a:p>
+            <a:pPr marL="742950" lvl="1" indent="-285750">
+              <a:lnSpc>
+                <a:spcPct val="90000"/>
+              </a:lnSpc>
+              <a:spcBef>
+                <a:spcPts val="500"/>
+              </a:spcBef>
+              <a:buFont typeface="Courier New,monospace" panose="020B0604020202020204" pitchFamily="34" charset="0"/>
+              <a:buChar char="o"/>
+            </a:pPr>
+            <a:r>
+              <a:rPr lang="fr-FR" sz="1600" dirty="0" err="1">
+                <a:solidFill>
+                  <a:prstClr val="black"/>
+                </a:solidFill>
+                <a:cs typeface="Arial"/>
+                <a:sym typeface="Wingdings" panose="05000000000000000000" pitchFamily="2" charset="2"/>
+              </a:rPr>
+              <a:t>reduction</a:t>
+            </a:r>
+            <a:r>
+              <a:rPr lang="fr-FR" sz="1600" dirty="0">
+                <a:solidFill>
+                  <a:prstClr val="black"/>
+                </a:solidFill>
+                <a:cs typeface="Arial"/>
+                <a:sym typeface="Wingdings" panose="05000000000000000000" pitchFamily="2" charset="2"/>
+              </a:rPr>
+              <a:t> of use of </a:t>
+            </a:r>
+            <a:r>
+              <a:rPr lang="en-US" sz="1600" dirty="0">
+                <a:solidFill>
+                  <a:prstClr val="black"/>
+                </a:solidFill>
+                <a:cs typeface="Arial"/>
+                <a:sym typeface="Wingdings" panose="05000000000000000000" pitchFamily="2" charset="2"/>
+              </a:rPr>
+              <a:t>fertilizers and pesticides</a:t>
+            </a:r>
+            <a:endParaRPr lang="en-US" sz="1600" dirty="0">
+              <a:solidFill>
+                <a:prstClr val="black"/>
+              </a:solidFill>
+              <a:cs typeface="Arial"/>
+            </a:endParaRPr>
+          </a:p>
+          <a:p>
+            <a:pPr marL="742950" lvl="1" indent="-285750">
+              <a:lnSpc>
+                <a:spcPct val="90000"/>
+              </a:lnSpc>
+              <a:spcBef>
+                <a:spcPts val="500"/>
+              </a:spcBef>
+              <a:buFont typeface="Courier New,monospace" panose="020B0604020202020204" pitchFamily="34" charset="0"/>
+              <a:buChar char="o"/>
+            </a:pPr>
+            <a:r>
+              <a:rPr lang="fr-FR" sz="1600" dirty="0" err="1">
+                <a:solidFill>
+                  <a:prstClr val="black"/>
+                </a:solidFill>
+                <a:cs typeface="Arial"/>
+              </a:rPr>
+              <a:t>increased</a:t>
+            </a:r>
+            <a:r>
+              <a:rPr lang="fr-FR" sz="1600" dirty="0">
+                <a:solidFill>
+                  <a:prstClr val="black"/>
+                </a:solidFill>
+                <a:cs typeface="Arial"/>
+              </a:rPr>
+              <a:t> </a:t>
+            </a:r>
+            <a:r>
+              <a:rPr lang="fr-FR" sz="1600" dirty="0" err="1">
+                <a:solidFill>
+                  <a:prstClr val="black"/>
+                </a:solidFill>
+                <a:cs typeface="Arial"/>
+              </a:rPr>
+              <a:t>yield</a:t>
+            </a:r>
+            <a:r>
+              <a:rPr lang="fr-FR" sz="1600" dirty="0">
+                <a:solidFill>
+                  <a:prstClr val="black"/>
+                </a:solidFill>
+                <a:cs typeface="Arial"/>
+              </a:rPr>
+              <a:t> </a:t>
+            </a:r>
+          </a:p>
+          <a:p>
+            <a:pPr lvl="1">
+              <a:lnSpc>
+                <a:spcPct val="90000"/>
+              </a:lnSpc>
+              <a:spcBef>
+                <a:spcPts val="500"/>
+              </a:spcBef>
+            </a:pPr>
+            <a:r>
+              <a:rPr lang="fr-FR" sz="1200" dirty="0">
+                <a:solidFill>
+                  <a:prstClr val="black"/>
+                </a:solidFill>
+                <a:cs typeface="Arial"/>
+              </a:rPr>
+              <a:t>(Jensen et al., 2020, </a:t>
+            </a:r>
+            <a:r>
+              <a:rPr lang="fr-FR" sz="1200" dirty="0" err="1">
+                <a:solidFill>
+                  <a:prstClr val="black"/>
+                </a:solidFill>
+                <a:cs typeface="Arial"/>
+              </a:rPr>
+              <a:t>Stomph</a:t>
+            </a:r>
+            <a:r>
+              <a:rPr lang="fr-FR" sz="1200" dirty="0">
+                <a:solidFill>
+                  <a:prstClr val="black"/>
+                </a:solidFill>
+                <a:cs typeface="Arial"/>
+              </a:rPr>
+              <a:t> et al., 2020, </a:t>
+            </a:r>
+            <a:r>
+              <a:rPr lang="fr-FR" sz="1200" dirty="0" err="1">
+                <a:solidFill>
+                  <a:prstClr val="black"/>
+                </a:solidFill>
+                <a:cs typeface="Arial"/>
+              </a:rPr>
+              <a:t>Gaudio</a:t>
+            </a:r>
+            <a:r>
+              <a:rPr lang="fr-FR" sz="1200" dirty="0">
+                <a:solidFill>
+                  <a:prstClr val="black"/>
+                </a:solidFill>
+                <a:cs typeface="Arial"/>
+              </a:rPr>
+              <a:t> et al., 2021)</a:t>
+            </a:r>
+            <a:endParaRPr lang="fr-FR" sz="1200" dirty="0">
+              <a:solidFill>
+                <a:prstClr val="black"/>
+              </a:solidFill>
+            </a:endParaRPr>
+          </a:p>
+        </p:txBody>
+      </p:sp>
+    </p:spTree>
+    <p:extLst>
+      <p:ext uri="{BB962C8B-B14F-4D97-AF65-F5344CB8AC3E}">
+        <p14:creationId xmlns:p14="http://schemas.microsoft.com/office/powerpoint/2010/main" val="1965073965"/>
+      </p:ext>
+    </p:extLst>
+  </p:cSld>
+  <p:clrMapOvr>
+    <a:masterClrMapping/>
+  </p:clrMapOvr>
+</p:sld>
+</file>
+
+<file path=ppt/slides/slide20.xml><?xml version="1.0" encoding="utf-8"?>
 <p:sld xmlns:a="http://schemas.openxmlformats.org/drawingml/2006/main" xmlns:r="http://schemas.openxmlformats.org/officeDocument/2006/relationships" xmlns:p="http://schemas.openxmlformats.org/presentationml/2006/main">
   <p:cSld>
     <p:spTree>
@@ -18636,7 +20223,7 @@
           <a:p>
             <a:fld id="{27C6CCC6-2BE5-4E42-96A4-D1E8E81A3D8E}" type="slidenum">
               <a:rPr lang="fr-FR" smtClean="0"/>
-              <a:t>19</a:t>
+              <a:t>20</a:t>
             </a:fld>
             <a:endParaRPr lang="fr-FR"/>
           </a:p>
@@ -19212,1142 +20799,7 @@
 </p:sld>
 </file>
 
-<file path=ppt/slides/slide2.xml><?xml version="1.0" encoding="utf-8"?>
-<p:sld xmlns:a="http://schemas.openxmlformats.org/drawingml/2006/main" xmlns:r="http://schemas.openxmlformats.org/officeDocument/2006/relationships" xmlns:p="http://schemas.openxmlformats.org/presentationml/2006/main">
-  <p:cSld>
-    <p:bg>
-      <p:bgPr>
-        <a:solidFill>
-          <a:schemeClr val="bg1"/>
-        </a:solidFill>
-        <a:effectLst/>
-      </p:bgPr>
-    </p:bg>
-    <p:spTree>
-      <p:nvGrpSpPr>
-        <p:cNvPr id="1" name=""/>
-        <p:cNvGrpSpPr/>
-        <p:nvPr/>
-      </p:nvGrpSpPr>
-      <p:grpSpPr>
-        <a:xfrm>
-          <a:off x="0" y="0"/>
-          <a:ext cx="0" cy="0"/>
-          <a:chOff x="0" y="0"/>
-          <a:chExt cx="0" cy="0"/>
-        </a:xfrm>
-      </p:grpSpPr>
-      <p:sp useBgFill="1">
-        <p:nvSpPr>
-          <p:cNvPr id="9" name="Rectangle 8">
-            <a:extLst>
-              <a:ext uri="{FF2B5EF4-FFF2-40B4-BE49-F238E27FC236}">
-                <a16:creationId xmlns:a16="http://schemas.microsoft.com/office/drawing/2014/main" id="{560AFAAC-EA6C-45A9-9E03-C9C9F0193B4F}"/>
-              </a:ext>
-              <a:ext uri="{C183D7F6-B498-43B3-948B-1728B52AA6E4}">
-                <adec:decorative xmlns:adec="http://schemas.microsoft.com/office/drawing/2017/decorative" val="1"/>
-              </a:ext>
-            </a:extLst>
-          </p:cNvPr>
-          <p:cNvSpPr>
-            <a:spLocks noGrp="1" noRot="1" noChangeAspect="1" noMove="1" noResize="1" noEditPoints="1" noAdjustHandles="1" noChangeArrowheads="1" noChangeShapeType="1" noTextEdit="1"/>
-          </p:cNvSpPr>
-          <p:nvPr>
-            <p:extLst>
-              <p:ext uri="{386F3935-93C4-4BCD-93E2-E3B085C9AB24}">
-                <p16:designElem xmlns:p16="http://schemas.microsoft.com/office/powerpoint/2015/main" val="1"/>
-              </p:ext>
-            </p:extLst>
-          </p:nvPr>
-        </p:nvSpPr>
-        <p:spPr>
-          <a:xfrm>
-            <a:off x="0" y="0"/>
-            <a:ext cx="12192000" cy="6858000"/>
-          </a:xfrm>
-          <a:prstGeom prst="rect">
-            <a:avLst/>
-          </a:prstGeom>
-          <a:ln>
-            <a:noFill/>
-          </a:ln>
-        </p:spPr>
-        <p:style>
-          <a:lnRef idx="2">
-            <a:schemeClr val="accent1">
-              <a:shade val="50000"/>
-            </a:schemeClr>
-          </a:lnRef>
-          <a:fillRef idx="1">
-            <a:schemeClr val="accent1"/>
-          </a:fillRef>
-          <a:effectRef idx="0">
-            <a:schemeClr val="accent1"/>
-          </a:effectRef>
-          <a:fontRef idx="minor">
-            <a:schemeClr val="lt1"/>
-          </a:fontRef>
-        </p:style>
-        <p:txBody>
-          <a:bodyPr rtlCol="0" anchor="ctr"/>
-          <a:lstStyle/>
-          <a:p>
-            <a:pPr algn="ctr"/>
-            <a:endParaRPr lang="en-US"/>
-          </a:p>
-        </p:txBody>
-      </p:sp>
-      <p:pic>
-        <p:nvPicPr>
-          <p:cNvPr id="5" name="Image 4" descr="Une image contenant plein air, agriculture, récolte, Culture commerciale&#10;&#10;Description générée automatiquement">
-            <a:extLst>
-              <a:ext uri="{FF2B5EF4-FFF2-40B4-BE49-F238E27FC236}">
-                <a16:creationId xmlns:a16="http://schemas.microsoft.com/office/drawing/2014/main" id="{3786E0D1-E499-E045-7B99-26DBAEB36AB5}"/>
-              </a:ext>
-            </a:extLst>
-          </p:cNvPr>
-          <p:cNvPicPr>
-            <a:picLocks noChangeAspect="1"/>
-          </p:cNvPicPr>
-          <p:nvPr/>
-        </p:nvPicPr>
-        <p:blipFill rotWithShape="1">
-          <a:blip r:embed="rId3"/>
-          <a:srcRect t="34" r="10050" b="-34"/>
-          <a:stretch/>
-        </p:blipFill>
-        <p:spPr>
-          <a:xfrm>
-            <a:off x="3009075" y="0"/>
-            <a:ext cx="9184645" cy="6861124"/>
-          </a:xfrm>
-          <a:prstGeom prst="rect">
-            <a:avLst/>
-          </a:prstGeom>
-        </p:spPr>
-      </p:pic>
-      <p:sp useBgFill="1">
-        <p:nvSpPr>
-          <p:cNvPr id="11" name="Freeform: Shape 10">
-            <a:extLst>
-              <a:ext uri="{FF2B5EF4-FFF2-40B4-BE49-F238E27FC236}">
-                <a16:creationId xmlns:a16="http://schemas.microsoft.com/office/drawing/2014/main" id="{83549E37-C86B-4401-90BD-D8BF83859F14}"/>
-              </a:ext>
-              <a:ext uri="{C183D7F6-B498-43B3-948B-1728B52AA6E4}">
-                <adec:decorative xmlns:adec="http://schemas.microsoft.com/office/drawing/2017/decorative" val="1"/>
-              </a:ext>
-            </a:extLst>
-          </p:cNvPr>
-          <p:cNvSpPr>
-            <a:spLocks noGrp="1" noRot="1" noChangeAspect="1" noMove="1" noResize="1" noEditPoints="1" noAdjustHandles="1" noChangeArrowheads="1" noChangeShapeType="1" noTextEdit="1"/>
-          </p:cNvSpPr>
-          <p:nvPr>
-            <p:extLst>
-              <p:ext uri="{386F3935-93C4-4BCD-93E2-E3B085C9AB24}">
-                <p16:designElem xmlns:p16="http://schemas.microsoft.com/office/powerpoint/2015/main" val="1"/>
-              </p:ext>
-            </p:extLst>
-          </p:nvPr>
-        </p:nvSpPr>
-        <p:spPr>
-          <a:xfrm>
-            <a:off x="0" y="0"/>
-            <a:ext cx="6096001" cy="6858000"/>
-          </a:xfrm>
-          <a:custGeom>
-            <a:avLst/>
-            <a:gdLst>
-              <a:gd name="connsiteX0" fmla="*/ 0 w 6096001"/>
-              <a:gd name="connsiteY0" fmla="*/ 0 h 6858000"/>
-              <a:gd name="connsiteX1" fmla="*/ 4883023 w 6096001"/>
-              <a:gd name="connsiteY1" fmla="*/ 0 h 6858000"/>
-              <a:gd name="connsiteX2" fmla="*/ 4946006 w 6096001"/>
-              <a:gd name="connsiteY2" fmla="*/ 69271 h 6858000"/>
-              <a:gd name="connsiteX3" fmla="*/ 6096001 w 6096001"/>
-              <a:gd name="connsiteY3" fmla="*/ 3429000 h 6858000"/>
-              <a:gd name="connsiteX4" fmla="*/ 4946006 w 6096001"/>
-              <a:gd name="connsiteY4" fmla="*/ 6788730 h 6858000"/>
-              <a:gd name="connsiteX5" fmla="*/ 4883023 w 6096001"/>
-              <a:gd name="connsiteY5" fmla="*/ 6858000 h 6858000"/>
-              <a:gd name="connsiteX6" fmla="*/ 0 w 6096001"/>
-              <a:gd name="connsiteY6" fmla="*/ 6858000 h 6858000"/>
-            </a:gdLst>
-            <a:ahLst/>
-            <a:cxnLst>
-              <a:cxn ang="0">
-                <a:pos x="connsiteX0" y="connsiteY0"/>
-              </a:cxn>
-              <a:cxn ang="0">
-                <a:pos x="connsiteX1" y="connsiteY1"/>
-              </a:cxn>
-              <a:cxn ang="0">
-                <a:pos x="connsiteX2" y="connsiteY2"/>
-              </a:cxn>
-              <a:cxn ang="0">
-                <a:pos x="connsiteX3" y="connsiteY3"/>
-              </a:cxn>
-              <a:cxn ang="0">
-                <a:pos x="connsiteX4" y="connsiteY4"/>
-              </a:cxn>
-              <a:cxn ang="0">
-                <a:pos x="connsiteX5" y="connsiteY5"/>
-              </a:cxn>
-              <a:cxn ang="0">
-                <a:pos x="connsiteX6" y="connsiteY6"/>
-              </a:cxn>
-            </a:cxnLst>
-            <a:rect l="l" t="t" r="r" b="b"/>
-            <a:pathLst>
-              <a:path w="6096001" h="6858000">
-                <a:moveTo>
-                  <a:pt x="0" y="0"/>
-                </a:moveTo>
-                <a:lnTo>
-                  <a:pt x="4883023" y="0"/>
-                </a:lnTo>
-                <a:lnTo>
-                  <a:pt x="4946006" y="69271"/>
-                </a:lnTo>
-                <a:cubicBezTo>
-                  <a:pt x="5656532" y="929100"/>
-                  <a:pt x="6096001" y="2116944"/>
-                  <a:pt x="6096001" y="3429000"/>
-                </a:cubicBezTo>
-                <a:cubicBezTo>
-                  <a:pt x="6096001" y="4741056"/>
-                  <a:pt x="5656532" y="5928900"/>
-                  <a:pt x="4946006" y="6788730"/>
-                </a:cubicBezTo>
-                <a:lnTo>
-                  <a:pt x="4883023" y="6858000"/>
-                </a:lnTo>
-                <a:lnTo>
-                  <a:pt x="0" y="6858000"/>
-                </a:lnTo>
-                <a:close/>
-              </a:path>
-            </a:pathLst>
-          </a:custGeom>
-          <a:ln w="9525">
-            <a:solidFill>
-              <a:srgbClr val="EFEFEF"/>
-            </a:solidFill>
-          </a:ln>
-          <a:effectLst>
-            <a:outerShdw blurRad="50800" dist="38100" algn="l" rotWithShape="0">
-              <a:schemeClr val="bg1">
-                <a:lumMod val="85000"/>
-                <a:alpha val="30000"/>
-              </a:schemeClr>
-            </a:outerShdw>
-          </a:effectLst>
-        </p:spPr>
-        <p:style>
-          <a:lnRef idx="2">
-            <a:schemeClr val="accent1">
-              <a:shade val="50000"/>
-            </a:schemeClr>
-          </a:lnRef>
-          <a:fillRef idx="1">
-            <a:schemeClr val="accent1"/>
-          </a:fillRef>
-          <a:effectRef idx="0">
-            <a:schemeClr val="accent1"/>
-          </a:effectRef>
-          <a:fontRef idx="minor">
-            <a:schemeClr val="lt1"/>
-          </a:fontRef>
-        </p:style>
-        <p:txBody>
-          <a:bodyPr wrap="square" rtlCol="0" anchor="ctr">
-            <a:noAutofit/>
-          </a:bodyPr>
-          <a:lstStyle/>
-          <a:p>
-            <a:pPr marL="0" marR="0" lvl="0" indent="0" algn="ctr" defTabSz="914400" rtl="0" eaLnBrk="1" fontAlgn="auto" latinLnBrk="0" hangingPunct="1">
-              <a:lnSpc>
-                <a:spcPct val="100000"/>
-              </a:lnSpc>
-              <a:spcBef>
-                <a:spcPts val="0"/>
-              </a:spcBef>
-              <a:spcAft>
-                <a:spcPts val="0"/>
-              </a:spcAft>
-              <a:buClrTx/>
-              <a:buSzTx/>
-              <a:buFontTx/>
-              <a:buNone/>
-              <a:tabLst/>
-              <a:defRPr/>
-            </a:pPr>
-            <a:endParaRPr kumimoji="0" lang="en-US" sz="1800" b="0" i="0" u="none" strike="noStrike" kern="1200" cap="none" spc="0" normalizeH="0" baseline="0" noProof="0">
-              <a:ln>
-                <a:noFill/>
-              </a:ln>
-              <a:solidFill>
-                <a:prstClr val="white"/>
-              </a:solidFill>
-              <a:effectLst/>
-              <a:uLnTx/>
-              <a:uFillTx/>
-              <a:latin typeface="Calibri" panose="020F0502020204030204"/>
-              <a:ea typeface="+mn-ea"/>
-              <a:cs typeface="+mn-cs"/>
-            </a:endParaRPr>
-          </a:p>
-        </p:txBody>
-      </p:sp>
-      <p:sp useBgFill="1">
-        <p:nvSpPr>
-          <p:cNvPr id="13" name="Freeform: Shape 12">
-            <a:extLst>
-              <a:ext uri="{FF2B5EF4-FFF2-40B4-BE49-F238E27FC236}">
-                <a16:creationId xmlns:a16="http://schemas.microsoft.com/office/drawing/2014/main" id="{8A17784E-76D8-4521-A77D-0D2EBB923004}"/>
-              </a:ext>
-              <a:ext uri="{C183D7F6-B498-43B3-948B-1728B52AA6E4}">
-                <adec:decorative xmlns:adec="http://schemas.microsoft.com/office/drawing/2017/decorative" val="1"/>
-              </a:ext>
-            </a:extLst>
-          </p:cNvPr>
-          <p:cNvSpPr>
-            <a:spLocks noGrp="1" noRot="1" noChangeAspect="1" noMove="1" noResize="1" noEditPoints="1" noAdjustHandles="1" noChangeArrowheads="1" noChangeShapeType="1" noTextEdit="1"/>
-          </p:cNvSpPr>
-          <p:nvPr>
-            <p:extLst>
-              <p:ext uri="{386F3935-93C4-4BCD-93E2-E3B085C9AB24}">
-                <p16:designElem xmlns:p16="http://schemas.microsoft.com/office/powerpoint/2015/main" val="1"/>
-              </p:ext>
-            </p:extLst>
-          </p:nvPr>
-        </p:nvSpPr>
-        <p:spPr>
-          <a:xfrm>
-            <a:off x="0" y="0"/>
-            <a:ext cx="6086857" cy="6858000"/>
-          </a:xfrm>
-          <a:custGeom>
-            <a:avLst/>
-            <a:gdLst>
-              <a:gd name="connsiteX0" fmla="*/ 0 w 6086857"/>
-              <a:gd name="connsiteY0" fmla="*/ 0 h 6858000"/>
-              <a:gd name="connsiteX1" fmla="*/ 4873879 w 6086857"/>
-              <a:gd name="connsiteY1" fmla="*/ 0 h 6858000"/>
-              <a:gd name="connsiteX2" fmla="*/ 4936862 w 6086857"/>
-              <a:gd name="connsiteY2" fmla="*/ 69271 h 6858000"/>
-              <a:gd name="connsiteX3" fmla="*/ 6086857 w 6086857"/>
-              <a:gd name="connsiteY3" fmla="*/ 3429000 h 6858000"/>
-              <a:gd name="connsiteX4" fmla="*/ 4936862 w 6086857"/>
-              <a:gd name="connsiteY4" fmla="*/ 6788730 h 6858000"/>
-              <a:gd name="connsiteX5" fmla="*/ 4873879 w 6086857"/>
-              <a:gd name="connsiteY5" fmla="*/ 6858000 h 6858000"/>
-              <a:gd name="connsiteX6" fmla="*/ 0 w 6086857"/>
-              <a:gd name="connsiteY6" fmla="*/ 6858000 h 6858000"/>
-            </a:gdLst>
-            <a:ahLst/>
-            <a:cxnLst>
-              <a:cxn ang="0">
-                <a:pos x="connsiteX0" y="connsiteY0"/>
-              </a:cxn>
-              <a:cxn ang="0">
-                <a:pos x="connsiteX1" y="connsiteY1"/>
-              </a:cxn>
-              <a:cxn ang="0">
-                <a:pos x="connsiteX2" y="connsiteY2"/>
-              </a:cxn>
-              <a:cxn ang="0">
-                <a:pos x="connsiteX3" y="connsiteY3"/>
-              </a:cxn>
-              <a:cxn ang="0">
-                <a:pos x="connsiteX4" y="connsiteY4"/>
-              </a:cxn>
-              <a:cxn ang="0">
-                <a:pos x="connsiteX5" y="connsiteY5"/>
-              </a:cxn>
-              <a:cxn ang="0">
-                <a:pos x="connsiteX6" y="connsiteY6"/>
-              </a:cxn>
-            </a:cxnLst>
-            <a:rect l="l" t="t" r="r" b="b"/>
-            <a:pathLst>
-              <a:path w="6086857" h="6858000">
-                <a:moveTo>
-                  <a:pt x="0" y="0"/>
-                </a:moveTo>
-                <a:lnTo>
-                  <a:pt x="4873879" y="0"/>
-                </a:lnTo>
-                <a:lnTo>
-                  <a:pt x="4936862" y="69271"/>
-                </a:lnTo>
-                <a:cubicBezTo>
-                  <a:pt x="5647388" y="929100"/>
-                  <a:pt x="6086857" y="2116944"/>
-                  <a:pt x="6086857" y="3429000"/>
-                </a:cubicBezTo>
-                <a:cubicBezTo>
-                  <a:pt x="6086857" y="4741056"/>
-                  <a:pt x="5647388" y="5928900"/>
-                  <a:pt x="4936862" y="6788730"/>
-                </a:cubicBezTo>
-                <a:lnTo>
-                  <a:pt x="4873879" y="6858000"/>
-                </a:lnTo>
-                <a:lnTo>
-                  <a:pt x="0" y="6858000"/>
-                </a:lnTo>
-                <a:close/>
-              </a:path>
-            </a:pathLst>
-          </a:custGeom>
-          <a:ln w="9525">
-            <a:noFill/>
-          </a:ln>
-          <a:effectLst/>
-        </p:spPr>
-        <p:style>
-          <a:lnRef idx="2">
-            <a:schemeClr val="accent1">
-              <a:shade val="50000"/>
-            </a:schemeClr>
-          </a:lnRef>
-          <a:fillRef idx="1">
-            <a:schemeClr val="accent1"/>
-          </a:fillRef>
-          <a:effectRef idx="0">
-            <a:schemeClr val="accent1"/>
-          </a:effectRef>
-          <a:fontRef idx="minor">
-            <a:schemeClr val="lt1"/>
-          </a:fontRef>
-        </p:style>
-        <p:txBody>
-          <a:bodyPr wrap="square" rtlCol="0" anchor="ctr">
-            <a:noAutofit/>
-          </a:bodyPr>
-          <a:lstStyle/>
-          <a:p>
-            <a:pPr marL="0" marR="0" lvl="0" indent="0" algn="ctr" defTabSz="914400" rtl="0" eaLnBrk="1" fontAlgn="auto" latinLnBrk="0" hangingPunct="1">
-              <a:lnSpc>
-                <a:spcPct val="100000"/>
-              </a:lnSpc>
-              <a:spcBef>
-                <a:spcPts val="0"/>
-              </a:spcBef>
-              <a:spcAft>
-                <a:spcPts val="0"/>
-              </a:spcAft>
-              <a:buClrTx/>
-              <a:buSzTx/>
-              <a:buFontTx/>
-              <a:buNone/>
-              <a:tabLst/>
-              <a:defRPr/>
-            </a:pPr>
-            <a:endParaRPr kumimoji="0" lang="en-US" sz="1800" b="0" i="0" u="none" strike="noStrike" kern="1200" cap="none" spc="0" normalizeH="0" baseline="0" noProof="0">
-              <a:ln>
-                <a:noFill/>
-              </a:ln>
-              <a:solidFill>
-                <a:prstClr val="white"/>
-              </a:solidFill>
-              <a:effectLst/>
-              <a:uLnTx/>
-              <a:uFillTx/>
-              <a:latin typeface="Calibri" panose="020F0502020204030204"/>
-              <a:ea typeface="+mn-ea"/>
-              <a:cs typeface="+mn-cs"/>
-            </a:endParaRPr>
-          </a:p>
-        </p:txBody>
-      </p:sp>
-      <p:sp>
-        <p:nvSpPr>
-          <p:cNvPr id="2" name="Titre 1">
-            <a:extLst>
-              <a:ext uri="{FF2B5EF4-FFF2-40B4-BE49-F238E27FC236}">
-                <a16:creationId xmlns:a16="http://schemas.microsoft.com/office/drawing/2014/main" id="{7DDB3797-4CC7-EDEE-FE39-54180F07BBDD}"/>
-              </a:ext>
-            </a:extLst>
-          </p:cNvPr>
-          <p:cNvSpPr>
-            <a:spLocks noGrp="1"/>
-          </p:cNvSpPr>
-          <p:nvPr>
-            <p:ph type="title"/>
-          </p:nvPr>
-        </p:nvSpPr>
-        <p:spPr>
-          <a:xfrm>
-            <a:off x="374904" y="272618"/>
-            <a:ext cx="4992624" cy="1243584"/>
-          </a:xfrm>
-        </p:spPr>
-        <p:txBody>
-          <a:bodyPr anchor="ctr">
-            <a:normAutofit/>
-          </a:bodyPr>
-          <a:lstStyle/>
-          <a:p>
-            <a:r>
-              <a:rPr lang="fr-FR" sz="4000" dirty="0" err="1"/>
-              <a:t>Intercropping</a:t>
-            </a:r>
-            <a:endParaRPr lang="fr-FR" sz="4000" dirty="0"/>
-          </a:p>
-        </p:txBody>
-      </p:sp>
-      <p:sp>
-        <p:nvSpPr>
-          <p:cNvPr id="3" name="Espace réservé du contenu 2">
-            <a:extLst>
-              <a:ext uri="{FF2B5EF4-FFF2-40B4-BE49-F238E27FC236}">
-                <a16:creationId xmlns:a16="http://schemas.microsoft.com/office/drawing/2014/main" id="{2F576957-2006-8C6B-72B0-A66981D2DBA4}"/>
-              </a:ext>
-            </a:extLst>
-          </p:cNvPr>
-          <p:cNvSpPr>
-            <a:spLocks noGrp="1"/>
-          </p:cNvSpPr>
-          <p:nvPr>
-            <p:ph idx="1"/>
-          </p:nvPr>
-        </p:nvSpPr>
-        <p:spPr>
-          <a:xfrm>
-            <a:off x="373184" y="1423788"/>
-            <a:ext cx="4875997" cy="1361942"/>
-          </a:xfrm>
-        </p:spPr>
-        <p:txBody>
-          <a:bodyPr vert="horz" lIns="91440" tIns="45720" rIns="91440" bIns="45720" rtlCol="0" anchor="t">
-            <a:normAutofit/>
-          </a:bodyPr>
-          <a:lstStyle/>
-          <a:p>
-            <a:pPr marL="0" indent="0">
-              <a:buNone/>
-            </a:pPr>
-            <a:r>
-              <a:rPr lang="fr-FR" sz="2000" dirty="0"/>
-              <a:t>= </a:t>
-            </a:r>
-            <a:r>
-              <a:rPr lang="fr-FR" sz="2000" dirty="0" err="1"/>
-              <a:t>agroecological</a:t>
-            </a:r>
-            <a:r>
-              <a:rPr lang="fr-FR" sz="2000" dirty="0"/>
-              <a:t> </a:t>
-            </a:r>
-            <a:r>
-              <a:rPr lang="fr-FR" sz="2000" dirty="0" err="1"/>
-              <a:t>pratice</a:t>
-            </a:r>
-            <a:r>
-              <a:rPr lang="fr-FR" sz="2000" dirty="0"/>
-              <a:t> </a:t>
-            </a:r>
-            <a:r>
-              <a:rPr lang="fr-FR" sz="2000" dirty="0" err="1"/>
-              <a:t>where</a:t>
-            </a:r>
-            <a:r>
-              <a:rPr lang="fr-FR" sz="2000" dirty="0"/>
-              <a:t> at least </a:t>
-            </a:r>
-            <a:r>
-              <a:rPr lang="fr-FR" sz="2000" dirty="0" err="1"/>
-              <a:t>two</a:t>
-            </a:r>
-            <a:r>
-              <a:rPr lang="fr-FR" sz="2000" dirty="0"/>
-              <a:t> </a:t>
-            </a:r>
-            <a:r>
-              <a:rPr lang="fr-FR" sz="2000" dirty="0" err="1"/>
-              <a:t>crop</a:t>
-            </a:r>
-            <a:r>
-              <a:rPr lang="fr-FR" sz="2000" dirty="0"/>
-              <a:t> </a:t>
-            </a:r>
-            <a:r>
-              <a:rPr lang="fr-FR" sz="2000" dirty="0" err="1"/>
-              <a:t>species</a:t>
-            </a:r>
-            <a:r>
-              <a:rPr lang="fr-FR" sz="2000" dirty="0"/>
-              <a:t> are </a:t>
-            </a:r>
-            <a:r>
-              <a:rPr lang="fr-FR" sz="2000" dirty="0" err="1"/>
-              <a:t>grown</a:t>
-            </a:r>
-            <a:r>
-              <a:rPr lang="fr-FR" sz="2000" dirty="0"/>
-              <a:t> </a:t>
-            </a:r>
-            <a:r>
-              <a:rPr lang="fr-FR" sz="2000" dirty="0" err="1"/>
-              <a:t>together</a:t>
-            </a:r>
-            <a:r>
-              <a:rPr lang="fr-FR" sz="2000" dirty="0"/>
-              <a:t> </a:t>
-            </a:r>
-          </a:p>
-          <a:p>
-            <a:pPr marL="0" indent="0">
-              <a:buNone/>
-            </a:pPr>
-            <a:r>
-              <a:rPr lang="fr-FR" sz="1200" dirty="0"/>
-              <a:t>(</a:t>
-            </a:r>
-            <a:r>
-              <a:rPr lang="fr-FR" sz="1200" dirty="0" err="1"/>
-              <a:t>Vandermeer</a:t>
-            </a:r>
-            <a:r>
-              <a:rPr lang="fr-FR" sz="1200" dirty="0"/>
-              <a:t>, 1989)</a:t>
-            </a:r>
-          </a:p>
-        </p:txBody>
-      </p:sp>
-      <p:sp>
-        <p:nvSpPr>
-          <p:cNvPr id="7" name="ZoneTexte 6">
-            <a:extLst>
-              <a:ext uri="{FF2B5EF4-FFF2-40B4-BE49-F238E27FC236}">
-                <a16:creationId xmlns:a16="http://schemas.microsoft.com/office/drawing/2014/main" id="{539C11AB-2D6F-DBBE-7F83-17817FF0989D}"/>
-              </a:ext>
-            </a:extLst>
-          </p:cNvPr>
-          <p:cNvSpPr txBox="1"/>
-          <p:nvPr/>
-        </p:nvSpPr>
-        <p:spPr>
-          <a:xfrm>
-            <a:off x="8763171" y="4131689"/>
-            <a:ext cx="1473905" cy="646331"/>
-          </a:xfrm>
-          <a:prstGeom prst="rect">
-            <a:avLst/>
-          </a:prstGeom>
-          <a:solidFill>
-            <a:srgbClr val="AEAEAE">
-              <a:alpha val="74902"/>
-            </a:srgbClr>
-          </a:solidFill>
-        </p:spPr>
-        <p:txBody>
-          <a:bodyPr rot="0" spcFirstLastPara="0" vertOverflow="overflow" horzOverflow="overflow" vert="horz" wrap="square" lIns="91440" tIns="45720" rIns="91440" bIns="45720" numCol="1" spcCol="0" rtlCol="0" fromWordArt="0" anchor="t" anchorCtr="0" forceAA="0" compatLnSpc="1">
-            <a:prstTxWarp prst="textNoShape">
-              <a:avLst/>
-            </a:prstTxWarp>
-            <a:spAutoFit/>
-          </a:bodyPr>
-          <a:lstStyle/>
-          <a:p>
-            <a:pPr algn="l"/>
-            <a:r>
-              <a:rPr lang="fr-FR" b="1" dirty="0"/>
-              <a:t>CEREALS</a:t>
-            </a:r>
-          </a:p>
-          <a:p>
-            <a:r>
-              <a:rPr lang="fr-FR" dirty="0"/>
-              <a:t>e.g.: </a:t>
-            </a:r>
-            <a:r>
-              <a:rPr lang="fr-FR" dirty="0" err="1"/>
-              <a:t>sorghum</a:t>
-            </a:r>
-            <a:endParaRPr lang="fr-FR" dirty="0"/>
-          </a:p>
-        </p:txBody>
-      </p:sp>
-      <p:sp>
-        <p:nvSpPr>
-          <p:cNvPr id="8" name="ZoneTexte 7">
-            <a:extLst>
-              <a:ext uri="{FF2B5EF4-FFF2-40B4-BE49-F238E27FC236}">
-                <a16:creationId xmlns:a16="http://schemas.microsoft.com/office/drawing/2014/main" id="{E217DA51-B5A8-AFAB-D602-DF8A424A8898}"/>
-              </a:ext>
-            </a:extLst>
-          </p:cNvPr>
-          <p:cNvSpPr txBox="1"/>
-          <p:nvPr/>
-        </p:nvSpPr>
-        <p:spPr>
-          <a:xfrm>
-            <a:off x="6716995" y="4131689"/>
-            <a:ext cx="1378792" cy="646331"/>
-          </a:xfrm>
-          <a:prstGeom prst="rect">
-            <a:avLst/>
-          </a:prstGeom>
-          <a:solidFill>
-            <a:srgbClr val="AEAEAE">
-              <a:alpha val="74902"/>
-            </a:srgbClr>
-          </a:solidFill>
-        </p:spPr>
-        <p:txBody>
-          <a:bodyPr rot="0" spcFirstLastPara="0" vertOverflow="overflow" horzOverflow="overflow" vert="horz" wrap="square" lIns="91440" tIns="45720" rIns="91440" bIns="45720" numCol="1" spcCol="0" rtlCol="0" fromWordArt="0" anchor="t" anchorCtr="0" forceAA="0" compatLnSpc="1">
-            <a:prstTxWarp prst="textNoShape">
-              <a:avLst/>
-            </a:prstTxWarp>
-            <a:spAutoFit/>
-          </a:bodyPr>
-          <a:lstStyle/>
-          <a:p>
-            <a:pPr algn="l"/>
-            <a:r>
-              <a:rPr lang="fr-FR" b="1" dirty="0"/>
-              <a:t>LEGUMES</a:t>
-            </a:r>
-          </a:p>
-          <a:p>
-            <a:r>
-              <a:rPr lang="fr-FR" dirty="0"/>
-              <a:t>e.g.: </a:t>
-            </a:r>
-            <a:r>
-              <a:rPr lang="fr-FR" dirty="0" err="1"/>
-              <a:t>cowpea</a:t>
-            </a:r>
-            <a:endParaRPr lang="fr-FR" dirty="0"/>
-          </a:p>
-        </p:txBody>
-      </p:sp>
-      <p:sp>
-        <p:nvSpPr>
-          <p:cNvPr id="4" name="Slide Number Placeholder 3">
-            <a:extLst>
-              <a:ext uri="{FF2B5EF4-FFF2-40B4-BE49-F238E27FC236}">
-                <a16:creationId xmlns:a16="http://schemas.microsoft.com/office/drawing/2014/main" id="{BE6FE07A-B7DD-4BCA-A02A-FB967C727457}"/>
-              </a:ext>
-            </a:extLst>
-          </p:cNvPr>
-          <p:cNvSpPr>
-            <a:spLocks noGrp="1"/>
-          </p:cNvSpPr>
-          <p:nvPr>
-            <p:ph type="sldNum" sz="quarter" idx="12"/>
-          </p:nvPr>
-        </p:nvSpPr>
-        <p:spPr/>
-        <p:txBody>
-          <a:bodyPr/>
-          <a:lstStyle/>
-          <a:p>
-            <a:fld id="{27C6CCC6-2BE5-4E42-96A4-D1E8E81A3D8E}" type="slidenum">
-              <a:rPr lang="fr-FR" smtClean="0"/>
-              <a:t>2</a:t>
-            </a:fld>
-            <a:endParaRPr lang="fr-FR"/>
-          </a:p>
-        </p:txBody>
-      </p:sp>
-      <p:sp>
-        <p:nvSpPr>
-          <p:cNvPr id="6" name="TextBox 5">
-            <a:extLst>
-              <a:ext uri="{FF2B5EF4-FFF2-40B4-BE49-F238E27FC236}">
-                <a16:creationId xmlns:a16="http://schemas.microsoft.com/office/drawing/2014/main" id="{B0131E4D-4574-4E1F-B022-5D79D8358D6D}"/>
-              </a:ext>
-            </a:extLst>
-          </p:cNvPr>
-          <p:cNvSpPr txBox="1"/>
-          <p:nvPr/>
-        </p:nvSpPr>
-        <p:spPr>
-          <a:xfrm>
-            <a:off x="374904" y="5495065"/>
-            <a:ext cx="4599161" cy="646331"/>
-          </a:xfrm>
-          <a:prstGeom prst="rect">
-            <a:avLst/>
-          </a:prstGeom>
-          <a:noFill/>
-        </p:spPr>
-        <p:txBody>
-          <a:bodyPr wrap="square" rtlCol="0">
-            <a:spAutoFit/>
-          </a:bodyPr>
-          <a:lstStyle/>
-          <a:p>
-            <a:pPr lvl="0">
-              <a:lnSpc>
-                <a:spcPct val="90000"/>
-              </a:lnSpc>
-              <a:spcBef>
-                <a:spcPts val="1000"/>
-              </a:spcBef>
-            </a:pPr>
-            <a:r>
-              <a:rPr lang="fr-FR" sz="2000" dirty="0">
-                <a:solidFill>
-                  <a:prstClr val="black"/>
-                </a:solidFill>
-              </a:rPr>
-              <a:t>… </a:t>
-            </a:r>
-            <a:r>
-              <a:rPr lang="fr-FR" sz="2000" dirty="0" err="1">
-                <a:solidFill>
-                  <a:prstClr val="black"/>
-                </a:solidFill>
-              </a:rPr>
-              <a:t>only</a:t>
-            </a:r>
-            <a:r>
-              <a:rPr lang="fr-FR" sz="2000" dirty="0">
-                <a:solidFill>
-                  <a:prstClr val="black"/>
-                </a:solidFill>
-              </a:rPr>
-              <a:t> if </a:t>
-            </a:r>
-            <a:r>
-              <a:rPr lang="fr-FR" sz="2000" dirty="0" err="1">
-                <a:solidFill>
-                  <a:prstClr val="black"/>
-                </a:solidFill>
-              </a:rPr>
-              <a:t>intercropping</a:t>
-            </a:r>
-            <a:r>
-              <a:rPr lang="fr-FR" sz="2000" dirty="0">
-                <a:solidFill>
-                  <a:prstClr val="black"/>
-                </a:solidFill>
-              </a:rPr>
-              <a:t> </a:t>
-            </a:r>
-            <a:r>
-              <a:rPr lang="fr-FR" sz="2000" dirty="0" err="1">
-                <a:solidFill>
-                  <a:prstClr val="black"/>
-                </a:solidFill>
-              </a:rPr>
-              <a:t>systems</a:t>
-            </a:r>
-            <a:r>
-              <a:rPr lang="fr-FR" sz="2000" dirty="0">
-                <a:solidFill>
-                  <a:prstClr val="black"/>
-                </a:solidFill>
-              </a:rPr>
-              <a:t> are </a:t>
-            </a:r>
-            <a:r>
-              <a:rPr lang="fr-FR" sz="2000" dirty="0" err="1">
-                <a:solidFill>
-                  <a:prstClr val="black"/>
-                </a:solidFill>
-              </a:rPr>
-              <a:t>optimized</a:t>
-            </a:r>
-            <a:endParaRPr lang="fr-FR" sz="2800" dirty="0">
-              <a:solidFill>
-                <a:prstClr val="black"/>
-              </a:solidFill>
-            </a:endParaRPr>
-          </a:p>
-        </p:txBody>
-      </p:sp>
-      <p:sp>
-        <p:nvSpPr>
-          <p:cNvPr id="10" name="TextBox 9">
-            <a:extLst>
-              <a:ext uri="{FF2B5EF4-FFF2-40B4-BE49-F238E27FC236}">
-                <a16:creationId xmlns:a16="http://schemas.microsoft.com/office/drawing/2014/main" id="{B1CE0F28-2DC4-4FEB-AAEF-720D45676D00}"/>
-              </a:ext>
-            </a:extLst>
-          </p:cNvPr>
-          <p:cNvSpPr txBox="1"/>
-          <p:nvPr/>
-        </p:nvSpPr>
-        <p:spPr>
-          <a:xfrm>
-            <a:off x="374903" y="3163088"/>
-            <a:ext cx="5111497" cy="1456809"/>
-          </a:xfrm>
-          <a:prstGeom prst="rect">
-            <a:avLst/>
-          </a:prstGeom>
-          <a:noFill/>
-        </p:spPr>
-        <p:txBody>
-          <a:bodyPr wrap="square" rtlCol="0">
-            <a:spAutoFit/>
-          </a:bodyPr>
-          <a:lstStyle/>
-          <a:p>
-            <a:pPr lvl="0">
-              <a:lnSpc>
-                <a:spcPct val="90000"/>
-              </a:lnSpc>
-              <a:spcBef>
-                <a:spcPts val="1000"/>
-              </a:spcBef>
-            </a:pPr>
-            <a:r>
-              <a:rPr lang="fr-FR" sz="2000" dirty="0" err="1">
-                <a:solidFill>
-                  <a:prstClr val="black"/>
-                </a:solidFill>
-              </a:rPr>
-              <a:t>Potential</a:t>
-            </a:r>
-            <a:r>
-              <a:rPr lang="fr-FR" sz="2000" dirty="0">
-                <a:solidFill>
-                  <a:prstClr val="black"/>
-                </a:solidFill>
-              </a:rPr>
-              <a:t> </a:t>
-            </a:r>
-            <a:r>
-              <a:rPr lang="fr-FR" sz="2000" dirty="0" err="1">
-                <a:solidFill>
-                  <a:prstClr val="black"/>
-                </a:solidFill>
-              </a:rPr>
-              <a:t>benefits</a:t>
-            </a:r>
-            <a:r>
-              <a:rPr lang="fr-FR" sz="2000" dirty="0">
-                <a:solidFill>
-                  <a:prstClr val="black"/>
-                </a:solidFill>
-              </a:rPr>
-              <a:t> : </a:t>
-            </a:r>
-          </a:p>
-          <a:p>
-            <a:pPr marL="742950" lvl="1" indent="-285750">
-              <a:lnSpc>
-                <a:spcPct val="90000"/>
-              </a:lnSpc>
-              <a:spcBef>
-                <a:spcPts val="500"/>
-              </a:spcBef>
-              <a:buFont typeface="Courier New,monospace" panose="020B0604020202020204" pitchFamily="34" charset="0"/>
-              <a:buChar char="o"/>
-            </a:pPr>
-            <a:r>
-              <a:rPr lang="fr-FR" sz="1600" dirty="0">
-                <a:solidFill>
-                  <a:prstClr val="black"/>
-                </a:solidFill>
-                <a:cs typeface="Arial"/>
-              </a:rPr>
-              <a:t>more </a:t>
-            </a:r>
-            <a:r>
-              <a:rPr lang="fr-FR" sz="1600" dirty="0" err="1">
-                <a:solidFill>
-                  <a:prstClr val="black"/>
-                </a:solidFill>
-                <a:cs typeface="Arial"/>
-              </a:rPr>
-              <a:t>resilience</a:t>
-            </a:r>
-            <a:r>
-              <a:rPr lang="fr-FR" sz="1600" dirty="0">
-                <a:solidFill>
-                  <a:prstClr val="black"/>
-                </a:solidFill>
-                <a:cs typeface="Arial"/>
-              </a:rPr>
-              <a:t> to stresses</a:t>
-            </a:r>
-            <a:endParaRPr lang="fr-FR" sz="1600" dirty="0">
-              <a:solidFill>
-                <a:prstClr val="black"/>
-              </a:solidFill>
-              <a:cs typeface="Arial"/>
-              <a:sym typeface="Wingdings" panose="05000000000000000000" pitchFamily="2" charset="2"/>
-            </a:endParaRPr>
-          </a:p>
-          <a:p>
-            <a:pPr marL="742950" lvl="1" indent="-285750">
-              <a:lnSpc>
-                <a:spcPct val="90000"/>
-              </a:lnSpc>
-              <a:spcBef>
-                <a:spcPts val="500"/>
-              </a:spcBef>
-              <a:buFont typeface="Courier New,monospace" panose="020B0604020202020204" pitchFamily="34" charset="0"/>
-              <a:buChar char="o"/>
-            </a:pPr>
-            <a:r>
-              <a:rPr lang="fr-FR" sz="1600" dirty="0" err="1">
-                <a:solidFill>
-                  <a:prstClr val="black"/>
-                </a:solidFill>
-                <a:cs typeface="Arial"/>
-                <a:sym typeface="Wingdings" panose="05000000000000000000" pitchFamily="2" charset="2"/>
-              </a:rPr>
-              <a:t>reduction</a:t>
-            </a:r>
-            <a:r>
-              <a:rPr lang="fr-FR" sz="1600" dirty="0">
-                <a:solidFill>
-                  <a:prstClr val="black"/>
-                </a:solidFill>
-                <a:cs typeface="Arial"/>
-                <a:sym typeface="Wingdings" panose="05000000000000000000" pitchFamily="2" charset="2"/>
-              </a:rPr>
-              <a:t> of use of </a:t>
-            </a:r>
-            <a:r>
-              <a:rPr lang="en-US" sz="1600" dirty="0">
-                <a:solidFill>
-                  <a:prstClr val="black"/>
-                </a:solidFill>
-                <a:cs typeface="Arial"/>
-                <a:sym typeface="Wingdings" panose="05000000000000000000" pitchFamily="2" charset="2"/>
-              </a:rPr>
-              <a:t>fertilizers and pesticides</a:t>
-            </a:r>
-            <a:endParaRPr lang="en-US" sz="1600" dirty="0">
-              <a:solidFill>
-                <a:prstClr val="black"/>
-              </a:solidFill>
-              <a:cs typeface="Arial"/>
-            </a:endParaRPr>
-          </a:p>
-          <a:p>
-            <a:pPr marL="742950" lvl="1" indent="-285750">
-              <a:lnSpc>
-                <a:spcPct val="90000"/>
-              </a:lnSpc>
-              <a:spcBef>
-                <a:spcPts val="500"/>
-              </a:spcBef>
-              <a:buFont typeface="Courier New,monospace" panose="020B0604020202020204" pitchFamily="34" charset="0"/>
-              <a:buChar char="o"/>
-            </a:pPr>
-            <a:r>
-              <a:rPr lang="fr-FR" sz="1600" dirty="0" err="1">
-                <a:solidFill>
-                  <a:prstClr val="black"/>
-                </a:solidFill>
-                <a:cs typeface="Arial"/>
-              </a:rPr>
-              <a:t>increased</a:t>
-            </a:r>
-            <a:r>
-              <a:rPr lang="fr-FR" sz="1600" dirty="0">
-                <a:solidFill>
-                  <a:prstClr val="black"/>
-                </a:solidFill>
-                <a:cs typeface="Arial"/>
-              </a:rPr>
-              <a:t> </a:t>
-            </a:r>
-            <a:r>
-              <a:rPr lang="fr-FR" sz="1600" dirty="0" err="1">
-                <a:solidFill>
-                  <a:prstClr val="black"/>
-                </a:solidFill>
-                <a:cs typeface="Arial"/>
-              </a:rPr>
-              <a:t>yield</a:t>
-            </a:r>
-            <a:r>
-              <a:rPr lang="fr-FR" sz="1600" dirty="0">
-                <a:solidFill>
-                  <a:prstClr val="black"/>
-                </a:solidFill>
-                <a:cs typeface="Arial"/>
-              </a:rPr>
-              <a:t> </a:t>
-            </a:r>
-          </a:p>
-          <a:p>
-            <a:pPr lvl="1">
-              <a:lnSpc>
-                <a:spcPct val="90000"/>
-              </a:lnSpc>
-              <a:spcBef>
-                <a:spcPts val="500"/>
-              </a:spcBef>
-            </a:pPr>
-            <a:r>
-              <a:rPr lang="fr-FR" sz="1200" dirty="0">
-                <a:solidFill>
-                  <a:prstClr val="black"/>
-                </a:solidFill>
-                <a:cs typeface="Arial"/>
-              </a:rPr>
-              <a:t>(Jensen et al., 2020, </a:t>
-            </a:r>
-            <a:r>
-              <a:rPr lang="fr-FR" sz="1200" dirty="0" err="1">
-                <a:solidFill>
-                  <a:prstClr val="black"/>
-                </a:solidFill>
-                <a:cs typeface="Arial"/>
-              </a:rPr>
-              <a:t>Stomph</a:t>
-            </a:r>
-            <a:r>
-              <a:rPr lang="fr-FR" sz="1200" dirty="0">
-                <a:solidFill>
-                  <a:prstClr val="black"/>
-                </a:solidFill>
-                <a:cs typeface="Arial"/>
-              </a:rPr>
-              <a:t> et al., 2020, </a:t>
-            </a:r>
-            <a:r>
-              <a:rPr lang="fr-FR" sz="1200" dirty="0" err="1">
-                <a:solidFill>
-                  <a:prstClr val="black"/>
-                </a:solidFill>
-                <a:cs typeface="Arial"/>
-              </a:rPr>
-              <a:t>Gaudio</a:t>
-            </a:r>
-            <a:r>
-              <a:rPr lang="fr-FR" sz="1200" dirty="0">
-                <a:solidFill>
-                  <a:prstClr val="black"/>
-                </a:solidFill>
-                <a:cs typeface="Arial"/>
-              </a:rPr>
-              <a:t> et al., 2021)</a:t>
-            </a:r>
-            <a:endParaRPr lang="fr-FR" sz="1200" dirty="0">
-              <a:solidFill>
-                <a:prstClr val="black"/>
-              </a:solidFill>
-            </a:endParaRPr>
-          </a:p>
-        </p:txBody>
-      </p:sp>
-    </p:spTree>
-    <p:extLst>
-      <p:ext uri="{BB962C8B-B14F-4D97-AF65-F5344CB8AC3E}">
-        <p14:creationId xmlns:p14="http://schemas.microsoft.com/office/powerpoint/2010/main" val="1965073965"/>
-      </p:ext>
-    </p:extLst>
-  </p:cSld>
-  <p:clrMapOvr>
-    <a:masterClrMapping/>
-  </p:clrMapOvr>
-</p:sld>
-</file>
-
-<file path=ppt/slides/slide20.xml><?xml version="1.0" encoding="utf-8"?>
+<file path=ppt/slides/slide21.xml><?xml version="1.0" encoding="utf-8"?>
 <p:sld xmlns:a="http://schemas.openxmlformats.org/drawingml/2006/main" xmlns:r="http://schemas.openxmlformats.org/officeDocument/2006/relationships" xmlns:p="http://schemas.openxmlformats.org/presentationml/2006/main">
   <p:cSld>
     <p:spTree>
@@ -20832,7 +21284,7 @@
           <a:p>
             <a:fld id="{27C6CCC6-2BE5-4E42-96A4-D1E8E81A3D8E}" type="slidenum">
               <a:rPr lang="fr-FR" smtClean="0"/>
-              <a:t>20</a:t>
+              <a:t>21</a:t>
             </a:fld>
             <a:endParaRPr lang="fr-FR"/>
           </a:p>
@@ -21448,7 +21900,7 @@
 </p:sld>
 </file>
 
-<file path=ppt/slides/slide21.xml><?xml version="1.0" encoding="utf-8"?>
+<file path=ppt/slides/slide22.xml><?xml version="1.0" encoding="utf-8"?>
 <p:sld xmlns:a="http://schemas.openxmlformats.org/drawingml/2006/main" xmlns:r="http://schemas.openxmlformats.org/officeDocument/2006/relationships" xmlns:p="http://schemas.openxmlformats.org/presentationml/2006/main">
   <p:cSld>
     <p:spTree>
@@ -21516,7 +21968,7 @@
           <a:p>
             <a:fld id="{27C6CCC6-2BE5-4E42-96A4-D1E8E81A3D8E}" type="slidenum">
               <a:rPr lang="fr-FR" smtClean="0"/>
-              <a:t>21</a:t>
+              <a:t>22</a:t>
             </a:fld>
             <a:endParaRPr lang="fr-FR"/>
           </a:p>
@@ -30403,7 +30855,7 @@
 </file>
 
 <file path=ppt/slides/slide9.xml><?xml version="1.0" encoding="utf-8"?>
-<p:sld xmlns:a="http://schemas.openxmlformats.org/drawingml/2006/main" xmlns:r="http://schemas.openxmlformats.org/officeDocument/2006/relationships" xmlns:p="http://schemas.openxmlformats.org/presentationml/2006/main">
+<p:sld xmlns:a="http://schemas.openxmlformats.org/drawingml/2006/main" xmlns:r="http://schemas.openxmlformats.org/officeDocument/2006/relationships" xmlns:p="http://schemas.openxmlformats.org/presentationml/2006/main" show="0">
   <p:cSld>
     <p:spTree>
       <p:nvGrpSpPr>
@@ -30421,10 +30873,10 @@
       </p:grpSpPr>
       <p:sp>
         <p:nvSpPr>
-          <p:cNvPr id="15" name="Rectangle: Rounded Corners 14">
+          <p:cNvPr id="17" name="Rectangle: Diagonal Corners Snipped 16">
             <a:extLst>
               <a:ext uri="{FF2B5EF4-FFF2-40B4-BE49-F238E27FC236}">
-                <a16:creationId xmlns:a16="http://schemas.microsoft.com/office/drawing/2014/main" id="{5807CF0F-B1FE-4895-A46C-A70E498E4EDC}"/>
+                <a16:creationId xmlns:a16="http://schemas.microsoft.com/office/drawing/2014/main" id="{293670AD-7624-4B36-BD7D-46DED881E2B9}"/>
               </a:ext>
             </a:extLst>
           </p:cNvPr>
@@ -30433,34 +30885,27 @@
         </p:nvSpPr>
         <p:spPr>
           <a:xfrm>
-            <a:off x="307908" y="2304661"/>
-            <a:ext cx="3699346" cy="4319683"/>
+            <a:off x="8030931" y="3036958"/>
+            <a:ext cx="3292630" cy="2743199"/>
           </a:xfrm>
-          <a:prstGeom prst="roundRect">
+          <a:prstGeom prst="snip2DiagRect">
             <a:avLst/>
           </a:prstGeom>
           <a:solidFill>
-            <a:srgbClr val="399758">
-              <a:alpha val="69804"/>
-            </a:srgbClr>
+            <a:srgbClr val="FFD89F"/>
           </a:solidFill>
-          <a:ln>
-            <a:solidFill>
-              <a:srgbClr val="399758"/>
-            </a:solidFill>
-          </a:ln>
         </p:spPr>
         <p:style>
           <a:lnRef idx="2">
-            <a:schemeClr val="accent2">
+            <a:schemeClr val="accent1">
               <a:shade val="50000"/>
             </a:schemeClr>
           </a:lnRef>
           <a:fillRef idx="1">
-            <a:schemeClr val="accent2"/>
+            <a:schemeClr val="accent1"/>
           </a:fillRef>
           <a:effectRef idx="0">
-            <a:schemeClr val="accent2"/>
+            <a:schemeClr val="accent1"/>
           </a:effectRef>
           <a:fontRef idx="minor">
             <a:schemeClr val="lt1"/>
@@ -30471,204 +30916,235 @@
           <a:lstStyle/>
           <a:p>
             <a:pPr algn="ctr"/>
-            <a:endParaRPr lang="en-US" dirty="0"/>
+            <a:endParaRPr lang="en-US"/>
           </a:p>
         </p:txBody>
       </p:sp>
       <p:sp>
         <p:nvSpPr>
-          <p:cNvPr id="2" name="Titre 1">
+          <p:cNvPr id="16" name="Rectangle: Diagonal Corners Snipped 15">
             <a:extLst>
               <a:ext uri="{FF2B5EF4-FFF2-40B4-BE49-F238E27FC236}">
-                <a16:creationId xmlns:a16="http://schemas.microsoft.com/office/drawing/2014/main" id="{E9057B95-F35D-C693-AE48-F6224EB5BCA4}"/>
+                <a16:creationId xmlns:a16="http://schemas.microsoft.com/office/drawing/2014/main" id="{707F41A6-3159-46CD-83B5-02EAD5C66679}"/>
               </a:ext>
             </a:extLst>
           </p:cNvPr>
-          <p:cNvSpPr>
-            <a:spLocks noGrp="1"/>
-          </p:cNvSpPr>
-          <p:nvPr>
-            <p:ph type="title"/>
-          </p:nvPr>
+          <p:cNvSpPr/>
+          <p:nvPr/>
         </p:nvSpPr>
         <p:spPr>
           <a:xfrm>
-            <a:off x="399548" y="389"/>
-            <a:ext cx="10515600" cy="1325563"/>
+            <a:off x="4569948" y="3019458"/>
+            <a:ext cx="3365454" cy="2743199"/>
           </a:xfrm>
+          <a:prstGeom prst="snip2DiagRect">
+            <a:avLst/>
+          </a:prstGeom>
+          <a:solidFill>
+            <a:srgbClr val="FFD89F"/>
+          </a:solidFill>
         </p:spPr>
+        <p:style>
+          <a:lnRef idx="2">
+            <a:schemeClr val="accent1">
+              <a:shade val="50000"/>
+            </a:schemeClr>
+          </a:lnRef>
+          <a:fillRef idx="1">
+            <a:schemeClr val="accent1"/>
+          </a:fillRef>
+          <a:effectRef idx="0">
+            <a:schemeClr val="accent1"/>
+          </a:effectRef>
+          <a:fontRef idx="minor">
+            <a:schemeClr val="lt1"/>
+          </a:fontRef>
+        </p:style>
         <p:txBody>
-          <a:bodyPr>
-            <a:normAutofit/>
-          </a:bodyPr>
+          <a:bodyPr rtlCol="0" anchor="ctr"/>
           <a:lstStyle/>
           <a:p>
-            <a:r>
-              <a:rPr lang="fr-FR" sz="3600" dirty="0" err="1"/>
-              <a:t>My</a:t>
-            </a:r>
-            <a:r>
-              <a:rPr lang="fr-FR" sz="3600" dirty="0"/>
-              <a:t> PhD : </a:t>
-            </a:r>
-            <a:r>
-              <a:rPr lang="fr-FR" sz="2800" dirty="0" err="1"/>
-              <a:t>Multiscale</a:t>
-            </a:r>
-            <a:r>
-              <a:rPr lang="fr-FR" sz="2800" dirty="0"/>
-              <a:t> </a:t>
-            </a:r>
-            <a:r>
-              <a:rPr lang="fr-FR" sz="2800" dirty="0" err="1"/>
-              <a:t>hybrid</a:t>
-            </a:r>
-            <a:r>
-              <a:rPr lang="fr-FR" sz="2800" dirty="0"/>
-              <a:t> </a:t>
-            </a:r>
-            <a:r>
-              <a:rPr lang="fr-FR" sz="2800" dirty="0" err="1"/>
-              <a:t>modelling</a:t>
-            </a:r>
-            <a:r>
-              <a:rPr lang="fr-FR" sz="2800" dirty="0"/>
-              <a:t> for </a:t>
-            </a:r>
-            <a:r>
-              <a:rPr lang="fr-FR" sz="2800" dirty="0" err="1"/>
-              <a:t>intercrops</a:t>
-            </a:r>
-            <a:r>
-              <a:rPr lang="fr-FR" sz="2800" dirty="0"/>
-              <a:t> </a:t>
-            </a:r>
+            <a:pPr algn="ctr"/>
+            <a:endParaRPr lang="en-US"/>
           </a:p>
         </p:txBody>
       </p:sp>
       <p:sp>
         <p:nvSpPr>
-          <p:cNvPr id="3" name="Espace réservé du contenu 2">
+          <p:cNvPr id="4" name="Rectangle: Diagonal Corners Snipped 3">
             <a:extLst>
               <a:ext uri="{FF2B5EF4-FFF2-40B4-BE49-F238E27FC236}">
-                <a16:creationId xmlns:a16="http://schemas.microsoft.com/office/drawing/2014/main" id="{7D8CCA93-EA18-4579-6817-2FB13627CCFE}"/>
+                <a16:creationId xmlns:a16="http://schemas.microsoft.com/office/drawing/2014/main" id="{D8A134D3-7C03-4F97-9E52-EBA5B21452F6}"/>
               </a:ext>
             </a:extLst>
           </p:cNvPr>
-          <p:cNvSpPr>
-            <a:spLocks noGrp="1"/>
-          </p:cNvSpPr>
-          <p:nvPr>
-            <p:ph idx="1"/>
-          </p:nvPr>
+          <p:cNvSpPr/>
+          <p:nvPr/>
         </p:nvSpPr>
         <p:spPr>
           <a:xfrm>
-            <a:off x="510149" y="2541726"/>
-            <a:ext cx="3296102" cy="4082618"/>
+            <a:off x="607383" y="3019458"/>
+            <a:ext cx="3857923" cy="2743199"/>
           </a:xfrm>
+          <a:prstGeom prst="snip2DiagRect">
+            <a:avLst/>
+          </a:prstGeom>
+          <a:solidFill>
+            <a:srgbClr val="FFD89F"/>
+          </a:solidFill>
         </p:spPr>
+        <p:style>
+          <a:lnRef idx="2">
+            <a:schemeClr val="accent1">
+              <a:shade val="50000"/>
+            </a:schemeClr>
+          </a:lnRef>
+          <a:fillRef idx="1">
+            <a:schemeClr val="accent1"/>
+          </a:fillRef>
+          <a:effectRef idx="0">
+            <a:schemeClr val="accent1"/>
+          </a:effectRef>
+          <a:fontRef idx="minor">
+            <a:schemeClr val="lt1"/>
+          </a:fontRef>
+        </p:style>
         <p:txBody>
-          <a:bodyPr>
-            <a:normAutofit lnSpcReduction="10000"/>
-          </a:bodyPr>
+          <a:bodyPr rtlCol="0" anchor="ctr"/>
           <a:lstStyle/>
           <a:p>
-            <a:pPr marL="0" indent="0">
-              <a:buNone/>
-            </a:pPr>
-            <a:r>
-              <a:rPr lang="fr-FR" b="1" dirty="0" err="1"/>
-              <a:t>Chapter</a:t>
-            </a:r>
-            <a:r>
-              <a:rPr lang="fr-FR" b="1" dirty="0"/>
-              <a:t> I </a:t>
-            </a:r>
-          </a:p>
-          <a:p>
-            <a:pPr marL="0" indent="0">
-              <a:buNone/>
-            </a:pPr>
-            <a:r>
-              <a:rPr lang="fr-FR" sz="2400" dirty="0" err="1"/>
-              <a:t>ArchiCrop</a:t>
-            </a:r>
-            <a:r>
-              <a:rPr lang="fr-FR" sz="2400" dirty="0"/>
-              <a:t>, </a:t>
-            </a:r>
-            <a:br>
-              <a:rPr lang="fr-FR" sz="2400" dirty="0"/>
-            </a:br>
-            <a:r>
-              <a:rPr lang="fr-FR" sz="2400" dirty="0"/>
-              <a:t>a 3D </a:t>
-            </a:r>
-            <a:r>
-              <a:rPr lang="fr-FR" sz="2400" dirty="0" err="1"/>
-              <a:t>dynamic</a:t>
-            </a:r>
-            <a:r>
-              <a:rPr lang="fr-FR" sz="2400" dirty="0"/>
-              <a:t> </a:t>
-            </a:r>
-            <a:r>
-              <a:rPr lang="fr-FR" sz="2400" dirty="0" err="1"/>
-              <a:t>parametric</a:t>
-            </a:r>
-            <a:r>
-              <a:rPr lang="fr-FR" sz="2400" dirty="0"/>
-              <a:t> model </a:t>
-            </a:r>
-          </a:p>
-          <a:p>
-            <a:pPr marL="0" indent="0">
-              <a:buNone/>
-            </a:pPr>
-            <a:endParaRPr lang="fr-FR" sz="2400" dirty="0"/>
-          </a:p>
-          <a:p>
-            <a:pPr marL="0" indent="0">
-              <a:buNone/>
-            </a:pPr>
-            <a:r>
-              <a:rPr lang="en-US" sz="2400" i="1" dirty="0"/>
-              <a:t>How to conceive a </a:t>
-            </a:r>
-            <a:r>
-              <a:rPr lang="en-US" sz="2400" b="1" i="1" dirty="0"/>
-              <a:t>3D plant model</a:t>
-            </a:r>
-            <a:r>
-              <a:rPr lang="en-US" sz="2400" i="1" dirty="0"/>
-              <a:t> with </a:t>
-            </a:r>
-            <a:r>
-              <a:rPr lang="en-US" sz="2400" b="1" i="1" dirty="0"/>
-              <a:t>few architectural and developmental parameters </a:t>
-            </a:r>
-            <a:r>
-              <a:rPr lang="en-US" sz="2400" i="1" dirty="0"/>
-              <a:t>and with a canopy-scale </a:t>
-            </a:r>
-            <a:r>
-              <a:rPr lang="en-US" sz="2400" b="1" i="1" dirty="0"/>
-              <a:t>constraint on growth </a:t>
-            </a:r>
-            <a:r>
-              <a:rPr lang="en-US" sz="2400" i="1" dirty="0"/>
-              <a:t>? </a:t>
-            </a:r>
+            <a:pPr algn="ctr"/>
+            <a:endParaRPr lang="en-US"/>
           </a:p>
         </p:txBody>
       </p:sp>
       <p:sp>
         <p:nvSpPr>
-          <p:cNvPr id="9" name="TextBox 8">
+          <p:cNvPr id="15" name="Rectangle 14">
             <a:extLst>
               <a:ext uri="{FF2B5EF4-FFF2-40B4-BE49-F238E27FC236}">
-                <a16:creationId xmlns:a16="http://schemas.microsoft.com/office/drawing/2014/main" id="{4B023A90-5157-4005-A976-38BB0A6FFD60}"/>
+                <a16:creationId xmlns:a16="http://schemas.microsoft.com/office/drawing/2014/main" id="{2B19D09E-F77F-4792-9293-E79FCCDB1E44}"/>
+              </a:ext>
+            </a:extLst>
+          </p:cNvPr>
+          <p:cNvSpPr/>
+          <p:nvPr/>
+        </p:nvSpPr>
+        <p:spPr>
+          <a:xfrm>
+            <a:off x="547423" y="1772818"/>
+            <a:ext cx="10718886" cy="830997"/>
+          </a:xfrm>
+          <a:prstGeom prst="rect">
+            <a:avLst/>
+          </a:prstGeom>
+        </p:spPr>
+        <p:txBody>
+          <a:bodyPr wrap="square">
+            <a:spAutoFit/>
+          </a:bodyPr>
+          <a:lstStyle/>
+          <a:p>
+            <a:pPr marL="285750" indent="-285750">
+              <a:buFont typeface="Wingdings" panose="05000000000000000000" pitchFamily="2" charset="2"/>
+              <a:buChar char="è"/>
+            </a:pPr>
+            <a:r>
+              <a:rPr lang="fr-FR" sz="2400" dirty="0">
+                <a:sym typeface="Wingdings" panose="05000000000000000000" pitchFamily="2" charset="2"/>
+              </a:rPr>
+              <a:t> by </a:t>
+            </a:r>
+            <a:r>
+              <a:rPr lang="fr-FR" sz="2400" b="1" dirty="0" err="1">
+                <a:sym typeface="Wingdings" panose="05000000000000000000" pitchFamily="2" charset="2"/>
+              </a:rPr>
+              <a:t>adapting</a:t>
+            </a:r>
+            <a:r>
+              <a:rPr lang="fr-FR" sz="2400" b="1" dirty="0">
+                <a:sym typeface="Wingdings" panose="05000000000000000000" pitchFamily="2" charset="2"/>
+              </a:rPr>
+              <a:t> </a:t>
+            </a:r>
+            <a:r>
+              <a:rPr lang="fr-FR" sz="2400" b="1" dirty="0" err="1">
+                <a:sym typeface="Wingdings" panose="05000000000000000000" pitchFamily="2" charset="2"/>
+              </a:rPr>
+              <a:t>crop</a:t>
+            </a:r>
+            <a:r>
+              <a:rPr lang="fr-FR" sz="2400" b="1" dirty="0">
+                <a:sym typeface="Wingdings" panose="05000000000000000000" pitchFamily="2" charset="2"/>
+              </a:rPr>
+              <a:t> </a:t>
+            </a:r>
+            <a:r>
+              <a:rPr lang="fr-FR" sz="2400" b="1" dirty="0" err="1">
+                <a:sym typeface="Wingdings" panose="05000000000000000000" pitchFamily="2" charset="2"/>
+              </a:rPr>
+              <a:t>models</a:t>
+            </a:r>
+            <a:r>
+              <a:rPr lang="fr-FR" sz="2400" dirty="0">
+                <a:sym typeface="Wingdings" panose="05000000000000000000" pitchFamily="2" charset="2"/>
+              </a:rPr>
+              <a:t> for </a:t>
+            </a:r>
+            <a:r>
+              <a:rPr lang="fr-FR" sz="2400" dirty="0" err="1">
+                <a:sym typeface="Wingdings" panose="05000000000000000000" pitchFamily="2" charset="2"/>
+              </a:rPr>
+              <a:t>considering</a:t>
+            </a:r>
+            <a:r>
+              <a:rPr lang="fr-FR" sz="2400" dirty="0">
+                <a:sym typeface="Wingdings" panose="05000000000000000000" pitchFamily="2" charset="2"/>
+              </a:rPr>
+              <a:t> more </a:t>
+            </a:r>
+            <a:r>
+              <a:rPr lang="fr-FR" sz="2400" b="1" dirty="0">
+                <a:sym typeface="Wingdings" panose="05000000000000000000" pitchFamily="2" charset="2"/>
+              </a:rPr>
+              <a:t>architectural and spatial </a:t>
+            </a:r>
+            <a:r>
+              <a:rPr lang="fr-FR" sz="2400" b="1" dirty="0" err="1">
+                <a:sym typeface="Wingdings" panose="05000000000000000000" pitchFamily="2" charset="2"/>
+              </a:rPr>
+              <a:t>heterogeneity</a:t>
+            </a:r>
+            <a:r>
+              <a:rPr lang="fr-FR" sz="2400" b="1" dirty="0">
+                <a:sym typeface="Wingdings" panose="05000000000000000000" pitchFamily="2" charset="2"/>
+              </a:rPr>
+              <a:t> </a:t>
+            </a:r>
+            <a:r>
+              <a:rPr lang="fr-FR" sz="2400" dirty="0">
+                <a:sym typeface="Wingdings" panose="05000000000000000000" pitchFamily="2" charset="2"/>
+              </a:rPr>
+              <a:t>of </a:t>
+            </a:r>
+            <a:r>
+              <a:rPr lang="fr-FR" sz="2400" dirty="0" err="1">
+                <a:sym typeface="Wingdings" panose="05000000000000000000" pitchFamily="2" charset="2"/>
+              </a:rPr>
+              <a:t>intercrops</a:t>
+            </a:r>
+            <a:endParaRPr lang="fr-FR" sz="2400" dirty="0">
+              <a:sym typeface="Wingdings" panose="05000000000000000000" pitchFamily="2" charset="2"/>
+            </a:endParaRPr>
+          </a:p>
+        </p:txBody>
+      </p:sp>
+      <p:sp>
+        <p:nvSpPr>
+          <p:cNvPr id="10" name="TextBox 9">
+            <a:extLst>
+              <a:ext uri="{FF2B5EF4-FFF2-40B4-BE49-F238E27FC236}">
+                <a16:creationId xmlns:a16="http://schemas.microsoft.com/office/drawing/2014/main" id="{55FA22D2-B079-4D92-8652-2054AAB6232A}"/>
               </a:ext>
             </a:extLst>
           </p:cNvPr>
@@ -30677,8 +31153,8 @@
         </p:nvSpPr>
         <p:spPr>
           <a:xfrm>
-            <a:off x="1261993" y="1068530"/>
-            <a:ext cx="9555989" cy="954107"/>
+            <a:off x="547423" y="6274630"/>
+            <a:ext cx="3207768" cy="307777"/>
           </a:xfrm>
           <a:prstGeom prst="rect">
             <a:avLst/>
@@ -30691,21 +31167,28 @@
           </a:bodyPr>
           <a:lstStyle/>
           <a:p>
-            <a:pPr algn="ctr"/>
-            <a:r>
-              <a:rPr lang="en-US" sz="2800" i="1" dirty="0"/>
-              <a:t>For given processes, what in plant architecture should we consider in intercrop models?</a:t>
-            </a:r>
-            <a:endParaRPr lang="fr-FR" sz="2800" i="1" dirty="0"/>
+            <a:r>
+              <a:rPr lang="fr-FR" sz="1400" dirty="0"/>
+              <a:t>(</a:t>
+            </a:r>
+            <a:r>
+              <a:rPr lang="fr-FR" sz="1400" dirty="0" err="1"/>
+              <a:t>Gaudio</a:t>
+            </a:r>
+            <a:r>
+              <a:rPr lang="fr-FR" sz="1400" dirty="0"/>
+              <a:t> et al., 2019)</a:t>
+            </a:r>
+            <a:endParaRPr lang="en-US" sz="1400" dirty="0"/>
           </a:p>
         </p:txBody>
       </p:sp>
       <p:sp>
         <p:nvSpPr>
-          <p:cNvPr id="10" name="Slide Number Placeholder 9">
+          <p:cNvPr id="11" name="Slide Number Placeholder 10">
             <a:extLst>
               <a:ext uri="{FF2B5EF4-FFF2-40B4-BE49-F238E27FC236}">
-                <a16:creationId xmlns:a16="http://schemas.microsoft.com/office/drawing/2014/main" id="{B067720C-0A92-4BD7-8CEE-EB4786CC39DA}"/>
+                <a16:creationId xmlns:a16="http://schemas.microsoft.com/office/drawing/2014/main" id="{252B2EDF-C232-4BB8-BCFF-E351BAD12D99}"/>
               </a:ext>
             </a:extLst>
           </p:cNvPr>
@@ -30725,14 +31208,446 @@
               <a:rPr lang="fr-FR" smtClean="0"/>
               <a:t>9</a:t>
             </a:fld>
+            <a:endParaRPr lang="fr-FR"/>
+          </a:p>
+        </p:txBody>
+      </p:sp>
+      <p:sp>
+        <p:nvSpPr>
+          <p:cNvPr id="50" name="Rectangle 49">
+            <a:extLst>
+              <a:ext uri="{FF2B5EF4-FFF2-40B4-BE49-F238E27FC236}">
+                <a16:creationId xmlns:a16="http://schemas.microsoft.com/office/drawing/2014/main" id="{927FDD9A-D2DA-4694-ABA6-485917682CF4}"/>
+              </a:ext>
+            </a:extLst>
+          </p:cNvPr>
+          <p:cNvSpPr/>
+          <p:nvPr/>
+        </p:nvSpPr>
+        <p:spPr>
+          <a:xfrm>
+            <a:off x="8201059" y="4339292"/>
+            <a:ext cx="3611703" cy="584775"/>
+          </a:xfrm>
+          <a:prstGeom prst="rect">
+            <a:avLst/>
+          </a:prstGeom>
+        </p:spPr>
+        <p:txBody>
+          <a:bodyPr wrap="square">
+            <a:spAutoFit/>
+          </a:bodyPr>
+          <a:lstStyle/>
+          <a:p>
+            <a:r>
+              <a:rPr lang="en-US" dirty="0"/>
+              <a:t>Hybrid 2.5D formalism in STICS </a:t>
+            </a:r>
+          </a:p>
+          <a:p>
+            <a:r>
+              <a:rPr lang="en-US" sz="1400" dirty="0"/>
+              <a:t>(</a:t>
+            </a:r>
+            <a:r>
+              <a:rPr lang="en-US" sz="1400" dirty="0" err="1"/>
+              <a:t>Vezy</a:t>
+            </a:r>
+            <a:r>
+              <a:rPr lang="en-US" sz="1400" dirty="0"/>
+              <a:t> et al., 2023)</a:t>
+            </a:r>
+            <a:endParaRPr lang="fr-FR" sz="1600" dirty="0"/>
+          </a:p>
+        </p:txBody>
+      </p:sp>
+      <p:sp>
+        <p:nvSpPr>
+          <p:cNvPr id="31" name="TextBox 30">
+            <a:extLst>
+              <a:ext uri="{FF2B5EF4-FFF2-40B4-BE49-F238E27FC236}">
+                <a16:creationId xmlns:a16="http://schemas.microsoft.com/office/drawing/2014/main" id="{2D5C4A14-BC09-45FF-80BD-BB97089BA765}"/>
+              </a:ext>
+            </a:extLst>
+          </p:cNvPr>
+          <p:cNvSpPr txBox="1"/>
+          <p:nvPr/>
+        </p:nvSpPr>
+        <p:spPr>
+          <a:xfrm>
+            <a:off x="8201059" y="4989844"/>
+            <a:ext cx="3113568" cy="584775"/>
+          </a:xfrm>
+          <a:prstGeom prst="rect">
+            <a:avLst/>
+          </a:prstGeom>
+          <a:noFill/>
+        </p:spPr>
+        <p:txBody>
+          <a:bodyPr wrap="square" rtlCol="0">
+            <a:spAutoFit/>
+          </a:bodyPr>
+          <a:lstStyle/>
+          <a:p>
+            <a:r>
+              <a:rPr lang="en-US" dirty="0"/>
+              <a:t>Incorporate effect of clumping</a:t>
+            </a:r>
+          </a:p>
+          <a:p>
+            <a:r>
+              <a:rPr lang="en-US" sz="1400" dirty="0"/>
+              <a:t>(</a:t>
+            </a:r>
+            <a:r>
+              <a:rPr lang="fr-FR" sz="1400" dirty="0"/>
+              <a:t>B</a:t>
+            </a:r>
+            <a:r>
+              <a:rPr lang="en-US" sz="1400" dirty="0" err="1"/>
+              <a:t>ailey</a:t>
+            </a:r>
+            <a:r>
+              <a:rPr lang="en-US" sz="1400" dirty="0"/>
+              <a:t> et al., 2020)</a:t>
+            </a:r>
+            <a:endParaRPr lang="en-US" sz="1600" dirty="0"/>
+          </a:p>
+        </p:txBody>
+      </p:sp>
+      <p:sp>
+        <p:nvSpPr>
+          <p:cNvPr id="51" name="Rectangle 50">
+            <a:extLst>
+              <a:ext uri="{FF2B5EF4-FFF2-40B4-BE49-F238E27FC236}">
+                <a16:creationId xmlns:a16="http://schemas.microsoft.com/office/drawing/2014/main" id="{D4FC1B4F-1B37-413D-A2DB-060D0A6D1E42}"/>
+              </a:ext>
+            </a:extLst>
+          </p:cNvPr>
+          <p:cNvSpPr/>
+          <p:nvPr/>
+        </p:nvSpPr>
+        <p:spPr>
+          <a:xfrm>
+            <a:off x="757109" y="4339293"/>
+            <a:ext cx="3566412" cy="1077218"/>
+          </a:xfrm>
+          <a:prstGeom prst="rect">
+            <a:avLst/>
+          </a:prstGeom>
+        </p:spPr>
+        <p:txBody>
+          <a:bodyPr wrap="square">
+            <a:spAutoFit/>
+          </a:bodyPr>
+          <a:lstStyle/>
+          <a:p>
+            <a:r>
+              <a:rPr lang="en-US" dirty="0"/>
+              <a:t>Evaluate turbid medium approach for simulating light interception </a:t>
+            </a:r>
+          </a:p>
+          <a:p>
+            <a:r>
+              <a:rPr lang="en-US" sz="1400" dirty="0"/>
+              <a:t>(</a:t>
+            </a:r>
+            <a:r>
+              <a:rPr lang="fr-FR" sz="1400" dirty="0" err="1"/>
+              <a:t>Barillot</a:t>
+            </a:r>
+            <a:r>
+              <a:rPr lang="fr-FR" sz="1400" dirty="0"/>
+              <a:t> et al., 2011; Feng et al., 2014; </a:t>
+            </a:r>
+            <a:r>
+              <a:rPr lang="en-US" sz="1400" dirty="0"/>
+              <a:t>Ponce de Leon and Bailey, 2019; Li et al., 2024)</a:t>
+            </a:r>
+            <a:endParaRPr lang="en-US" sz="1600" dirty="0"/>
+          </a:p>
+        </p:txBody>
+      </p:sp>
+      <p:sp>
+        <p:nvSpPr>
+          <p:cNvPr id="52" name="Rectangle 51">
+            <a:extLst>
+              <a:ext uri="{FF2B5EF4-FFF2-40B4-BE49-F238E27FC236}">
+                <a16:creationId xmlns:a16="http://schemas.microsoft.com/office/drawing/2014/main" id="{663C0DE6-BE9C-4AB9-943B-5E9DA0CF9EFE}"/>
+              </a:ext>
+            </a:extLst>
+          </p:cNvPr>
+          <p:cNvSpPr/>
+          <p:nvPr/>
+        </p:nvSpPr>
+        <p:spPr>
+          <a:xfrm>
+            <a:off x="4717025" y="4339292"/>
+            <a:ext cx="3113568" cy="1077218"/>
+          </a:xfrm>
+          <a:prstGeom prst="rect">
+            <a:avLst/>
+          </a:prstGeom>
+        </p:spPr>
+        <p:txBody>
+          <a:bodyPr wrap="square">
+            <a:spAutoFit/>
+          </a:bodyPr>
+          <a:lstStyle/>
+          <a:p>
+            <a:r>
+              <a:rPr lang="fr-FR" dirty="0"/>
+              <a:t>I</a:t>
+            </a:r>
+            <a:r>
+              <a:rPr lang="en-US" dirty="0" err="1"/>
+              <a:t>mpact</a:t>
+            </a:r>
+            <a:r>
+              <a:rPr lang="en-US" dirty="0"/>
+              <a:t> of plant architectural variations on light interception</a:t>
+            </a:r>
             <a:endParaRPr lang="fr-FR" dirty="0"/>
+          </a:p>
+          <a:p>
+            <a:r>
+              <a:rPr lang="fr-FR" sz="1400" dirty="0"/>
+              <a:t>(</a:t>
+            </a:r>
+            <a:r>
+              <a:rPr lang="fr-FR" sz="1400" dirty="0" err="1"/>
+              <a:t>Barillot</a:t>
+            </a:r>
+            <a:r>
+              <a:rPr lang="fr-FR" sz="1400" dirty="0"/>
+              <a:t> et al., 2014; T</a:t>
+            </a:r>
+            <a:r>
+              <a:rPr lang="en-US" sz="1400" dirty="0" err="1"/>
+              <a:t>ruong</a:t>
+            </a:r>
+            <a:r>
+              <a:rPr lang="en-US" sz="1400" dirty="0"/>
+              <a:t> et al, 2015; </a:t>
+            </a:r>
+            <a:r>
+              <a:rPr lang="en-US" sz="1400" dirty="0" err="1"/>
+              <a:t>Barillot</a:t>
+            </a:r>
+            <a:r>
+              <a:rPr lang="en-US" sz="1400" dirty="0"/>
+              <a:t> et al., 2019, Perez et al., 2019)</a:t>
+            </a:r>
+          </a:p>
+        </p:txBody>
+      </p:sp>
+      <p:sp>
+        <p:nvSpPr>
+          <p:cNvPr id="53" name="TextBox 52">
+            <a:extLst>
+              <a:ext uri="{FF2B5EF4-FFF2-40B4-BE49-F238E27FC236}">
+                <a16:creationId xmlns:a16="http://schemas.microsoft.com/office/drawing/2014/main" id="{F63DF9AE-7D49-40AF-9CE8-29C8AD4C08AA}"/>
+              </a:ext>
+            </a:extLst>
+          </p:cNvPr>
+          <p:cNvSpPr txBox="1"/>
+          <p:nvPr/>
+        </p:nvSpPr>
+        <p:spPr>
+          <a:xfrm>
+            <a:off x="757109" y="3146746"/>
+            <a:ext cx="3708197" cy="1015663"/>
+          </a:xfrm>
+          <a:prstGeom prst="rect">
+            <a:avLst/>
+          </a:prstGeom>
+          <a:noFill/>
+        </p:spPr>
+        <p:txBody>
+          <a:bodyPr wrap="square" rtlCol="0">
+            <a:spAutoFit/>
+          </a:bodyPr>
+          <a:lstStyle/>
+          <a:p>
+            <a:r>
+              <a:rPr lang="en-US" sz="2000" b="1" dirty="0"/>
+              <a:t>1. Evaluate performance of existing crop model formalisms for heterogeneous canopies</a:t>
+            </a:r>
+          </a:p>
+        </p:txBody>
+      </p:sp>
+      <p:sp>
+        <p:nvSpPr>
+          <p:cNvPr id="54" name="TextBox 53">
+            <a:extLst>
+              <a:ext uri="{FF2B5EF4-FFF2-40B4-BE49-F238E27FC236}">
+                <a16:creationId xmlns:a16="http://schemas.microsoft.com/office/drawing/2014/main" id="{5B296E1A-DE6E-41AC-832C-248CACC44DEC}"/>
+              </a:ext>
+            </a:extLst>
+          </p:cNvPr>
+          <p:cNvSpPr txBox="1"/>
+          <p:nvPr/>
+        </p:nvSpPr>
+        <p:spPr>
+          <a:xfrm>
+            <a:off x="4717025" y="3146746"/>
+            <a:ext cx="2828261" cy="1015663"/>
+          </a:xfrm>
+          <a:prstGeom prst="rect">
+            <a:avLst/>
+          </a:prstGeom>
+          <a:noFill/>
+        </p:spPr>
+        <p:txBody>
+          <a:bodyPr wrap="square" rtlCol="0">
+            <a:spAutoFit/>
+          </a:bodyPr>
+          <a:lstStyle/>
+          <a:p>
+            <a:r>
+              <a:rPr lang="en-US" sz="2000" b="1" dirty="0"/>
+              <a:t>2. Identify architectural traits of interest for a given process</a:t>
+            </a:r>
+          </a:p>
+        </p:txBody>
+      </p:sp>
+      <p:sp>
+        <p:nvSpPr>
+          <p:cNvPr id="55" name="TextBox 54">
+            <a:extLst>
+              <a:ext uri="{FF2B5EF4-FFF2-40B4-BE49-F238E27FC236}">
+                <a16:creationId xmlns:a16="http://schemas.microsoft.com/office/drawing/2014/main" id="{FA0DF061-EC3D-40C5-80C8-0CE5587D7A7E}"/>
+              </a:ext>
+            </a:extLst>
+          </p:cNvPr>
+          <p:cNvSpPr txBox="1"/>
+          <p:nvPr/>
+        </p:nvSpPr>
+        <p:spPr>
+          <a:xfrm>
+            <a:off x="8201059" y="3150940"/>
+            <a:ext cx="2828261" cy="707886"/>
+          </a:xfrm>
+          <a:prstGeom prst="rect">
+            <a:avLst/>
+          </a:prstGeom>
+          <a:noFill/>
+        </p:spPr>
+        <p:txBody>
+          <a:bodyPr wrap="square" rtlCol="0">
+            <a:spAutoFit/>
+          </a:bodyPr>
+          <a:lstStyle/>
+          <a:p>
+            <a:r>
+              <a:rPr lang="en-US" sz="2000" b="1" dirty="0"/>
+              <a:t>3. Find new formalisms for crop models</a:t>
+            </a:r>
+          </a:p>
+        </p:txBody>
+      </p:sp>
+      <p:sp>
+        <p:nvSpPr>
+          <p:cNvPr id="18" name="Title 1">
+            <a:extLst>
+              <a:ext uri="{FF2B5EF4-FFF2-40B4-BE49-F238E27FC236}">
+                <a16:creationId xmlns:a16="http://schemas.microsoft.com/office/drawing/2014/main" id="{3EDDBF12-1243-4F0D-8812-ED58665DAFBE}"/>
+              </a:ext>
+            </a:extLst>
+          </p:cNvPr>
+          <p:cNvSpPr>
+            <a:spLocks noGrp="1"/>
+          </p:cNvSpPr>
+          <p:nvPr>
+            <p:ph type="title"/>
+          </p:nvPr>
+        </p:nvSpPr>
+        <p:spPr>
+          <a:xfrm>
+            <a:off x="547423" y="316405"/>
+            <a:ext cx="10515600" cy="1325563"/>
+          </a:xfrm>
+        </p:spPr>
+        <p:txBody>
+          <a:bodyPr>
+            <a:normAutofit/>
+          </a:bodyPr>
+          <a:lstStyle/>
+          <a:p>
+            <a:r>
+              <a:rPr lang="fr-FR" sz="3600" dirty="0">
+                <a:sym typeface="Wingdings" panose="05000000000000000000" pitchFamily="2" charset="2"/>
+              </a:rPr>
+              <a:t>How to </a:t>
+            </a:r>
+            <a:r>
+              <a:rPr lang="fr-FR" sz="3600" dirty="0" err="1">
+                <a:sym typeface="Wingdings" panose="05000000000000000000" pitchFamily="2" charset="2"/>
+              </a:rPr>
+              <a:t>benefit</a:t>
+            </a:r>
+            <a:r>
+              <a:rPr lang="fr-FR" sz="3600" dirty="0">
+                <a:sym typeface="Wingdings" panose="05000000000000000000" pitchFamily="2" charset="2"/>
+              </a:rPr>
+              <a:t> </a:t>
+            </a:r>
+            <a:r>
+              <a:rPr lang="fr-FR" sz="3600" dirty="0" err="1">
+                <a:sym typeface="Wingdings" panose="05000000000000000000" pitchFamily="2" charset="2"/>
+              </a:rPr>
+              <a:t>from</a:t>
+            </a:r>
+            <a:r>
+              <a:rPr lang="fr-FR" sz="3600" dirty="0">
+                <a:sym typeface="Wingdings" panose="05000000000000000000" pitchFamily="2" charset="2"/>
+              </a:rPr>
+              <a:t> the best of </a:t>
+            </a:r>
+            <a:r>
+              <a:rPr lang="fr-FR" sz="3600" dirty="0" err="1">
+                <a:sym typeface="Wingdings" panose="05000000000000000000" pitchFamily="2" charset="2"/>
+              </a:rPr>
+              <a:t>both</a:t>
+            </a:r>
+            <a:r>
+              <a:rPr lang="fr-FR" sz="3600" dirty="0">
+                <a:sym typeface="Wingdings" panose="05000000000000000000" pitchFamily="2" charset="2"/>
+              </a:rPr>
+              <a:t> </a:t>
+            </a:r>
+            <a:r>
+              <a:rPr lang="fr-FR" sz="3600" dirty="0" err="1">
+                <a:sym typeface="Wingdings" panose="05000000000000000000" pitchFamily="2" charset="2"/>
+              </a:rPr>
+              <a:t>approaches</a:t>
+            </a:r>
+            <a:r>
+              <a:rPr lang="fr-FR" sz="3600" dirty="0">
+                <a:sym typeface="Wingdings" panose="05000000000000000000" pitchFamily="2" charset="2"/>
+              </a:rPr>
+              <a:t> for </a:t>
+            </a:r>
+            <a:r>
+              <a:rPr lang="fr-FR" sz="3600" dirty="0" err="1">
+                <a:sym typeface="Wingdings" panose="05000000000000000000" pitchFamily="2" charset="2"/>
+              </a:rPr>
+              <a:t>intercrops</a:t>
+            </a:r>
+            <a:r>
+              <a:rPr lang="fr-FR" sz="3600" dirty="0">
+                <a:sym typeface="Wingdings" panose="05000000000000000000" pitchFamily="2" charset="2"/>
+              </a:rPr>
+              <a:t>?</a:t>
+            </a:r>
+            <a:endParaRPr lang="en-US" sz="3400" dirty="0"/>
           </a:p>
         </p:txBody>
       </p:sp>
     </p:spTree>
     <p:extLst>
       <p:ext uri="{BB962C8B-B14F-4D97-AF65-F5344CB8AC3E}">
-        <p14:creationId xmlns:p14="http://schemas.microsoft.com/office/powerpoint/2010/main" val="2932026329"/>
+        <p14:creationId xmlns:p14="http://schemas.microsoft.com/office/powerpoint/2010/main" val="4129925707"/>
       </p:ext>
     </p:extLst>
   </p:cSld>
@@ -31319,6 +32234,15 @@
 </file>
 
 <file path=customXml/item1.xml><?xml version="1.0" encoding="utf-8"?>
+<?mso-contentType ?>
+<FormTemplates xmlns="http://schemas.microsoft.com/sharepoint/v3/contenttype/forms">
+  <Display>DocumentLibraryForm</Display>
+  <Edit>DocumentLibraryForm</Edit>
+  <New>DocumentLibraryForm</New>
+</FormTemplates>
+</file>
+
+<file path=customXml/item2.xml><?xml version="1.0" encoding="utf-8"?>
 <ct:contentTypeSchema xmlns:ct="http://schemas.microsoft.com/office/2006/metadata/contentType" xmlns:ma="http://schemas.microsoft.com/office/2006/metadata/properties/metaAttributes" ct:_="" ma:_="" ma:contentTypeName="Document" ma:contentTypeID="0x010100F6AAEAEC55338B4CBD1310BC20ECA43B" ma:contentTypeVersion="6" ma:contentTypeDescription="Crée un document." ma:contentTypeScope="" ma:versionID="f3bee9aad377d983e5ace40107548819">
   <xsd:schema xmlns:xsd="http://www.w3.org/2001/XMLSchema" xmlns:xs="http://www.w3.org/2001/XMLSchema" xmlns:p="http://schemas.microsoft.com/office/2006/metadata/properties" xmlns:ns2="5e11a331-0175-485c-b5bc-7baf3794bcc4" xmlns:ns3="6123b362-d884-4010-ad19-191a22b79bf5" targetNamespace="http://schemas.microsoft.com/office/2006/metadata/properties" ma:root="true" ma:fieldsID="da4ddf064b527fafbeea9bca5b83bae1" ns2:_="" ns3:_="">
     <xsd:import namespace="5e11a331-0175-485c-b5bc-7baf3794bcc4"/>
@@ -31495,16 +32419,15 @@
 </ct:contentTypeSchema>
 </file>
 
-<file path=customXml/item2.xml><?xml version="1.0" encoding="utf-8"?>
-<?mso-contentType ?>
-<FormTemplates xmlns="http://schemas.microsoft.com/sharepoint/v3/contenttype/forms">
-  <Display>DocumentLibraryForm</Display>
-  <Edit>DocumentLibraryForm</Edit>
-  <New>DocumentLibraryForm</New>
-</FormTemplates>
+<file path=customXml/itemProps1.xml><?xml version="1.0" encoding="utf-8"?>
+<ds:datastoreItem xmlns:ds="http://schemas.openxmlformats.org/officeDocument/2006/customXml" ds:itemID="{C51A9BF6-46C8-4A93-8A6C-1B6AB6A4872B}">
+  <ds:schemaRefs>
+    <ds:schemaRef ds:uri="http://schemas.microsoft.com/sharepoint/v3/contenttype/forms"/>
+  </ds:schemaRefs>
+</ds:datastoreItem>
 </file>
 
-<file path=customXml/itemProps1.xml><?xml version="1.0" encoding="utf-8"?>
+<file path=customXml/itemProps2.xml><?xml version="1.0" encoding="utf-8"?>
 <ds:datastoreItem xmlns:ds="http://schemas.openxmlformats.org/officeDocument/2006/customXml" ds:itemID="{3D367EEE-588A-43EA-B4CA-B1329416185A}">
   <ds:schemaRefs>
     <ds:schemaRef ds:uri="http://schemas.microsoft.com/office/2006/metadata/contentType"/>
@@ -31521,12 +32444,4 @@
     <ds:schemaRef ds:uri="http://schemas.microsoft.com/internal/obd"/>
   </ds:schemaRefs>
 </ds:datastoreItem>
-</file>
-
-<file path=customXml/itemProps2.xml><?xml version="1.0" encoding="utf-8"?>
-<ds:datastoreItem xmlns:ds="http://schemas.openxmlformats.org/officeDocument/2006/customXml" ds:itemID="{C51A9BF6-46C8-4A93-8A6C-1B6AB6A4872B}">
-  <ds:schemaRefs>
-    <ds:schemaRef ds:uri="http://schemas.microsoft.com/sharepoint/v3/contenttype/forms"/>
-  </ds:schemaRefs>
-</ds:datastoreItem>
 </file>